--- a/docs/pptx/carbo/ritu-carbo-linsubhr-dosedisc-akikdigo.pptx
+++ b/docs/pptx/carbo/ritu-carbo-linsubhr-dosedisc-akikdigo.pptx
@@ -2443,7 +2443,7 @@
           </p:nvSpPr>
           <p:spPr>
             <a:xfrm>
-              <a:off x="909675" y="1896563"/>
+              <a:off x="911833" y="1896563"/>
               <a:ext cx="0" cy="3826579"/>
             </a:xfrm>
             <a:custGeom>
@@ -2486,7 +2486,7 @@
           </p:nvSpPr>
           <p:spPr>
             <a:xfrm>
-              <a:off x="3323794" y="1896563"/>
+              <a:off x="3322810" y="1896563"/>
               <a:ext cx="0" cy="3826579"/>
             </a:xfrm>
             <a:custGeom>
@@ -2529,7 +2529,7 @@
           </p:nvSpPr>
           <p:spPr>
             <a:xfrm>
-              <a:off x="5737913" y="1896563"/>
+              <a:off x="5733788" y="1896563"/>
               <a:ext cx="0" cy="3826579"/>
             </a:xfrm>
             <a:custGeom>
@@ -2572,7 +2572,7 @@
           </p:nvSpPr>
           <p:spPr>
             <a:xfrm>
-              <a:off x="8152032" y="1896563"/>
+              <a:off x="8144765" y="1896563"/>
               <a:ext cx="0" cy="3826579"/>
             </a:xfrm>
             <a:custGeom>
@@ -2830,7 +2830,7 @@
           </p:nvSpPr>
           <p:spPr>
             <a:xfrm>
-              <a:off x="2116734" y="1896563"/>
+              <a:off x="2117321" y="1896563"/>
               <a:ext cx="0" cy="3826579"/>
             </a:xfrm>
             <a:custGeom>
@@ -2873,7 +2873,7 @@
           </p:nvSpPr>
           <p:spPr>
             <a:xfrm>
-              <a:off x="4530853" y="1896563"/>
+              <a:off x="4528299" y="1896563"/>
               <a:ext cx="0" cy="3826579"/>
             </a:xfrm>
             <a:custGeom>
@@ -2916,7 +2916,7 @@
           </p:nvSpPr>
           <p:spPr>
             <a:xfrm>
-              <a:off x="6944973" y="1896563"/>
+              <a:off x="6939276" y="1896563"/>
               <a:ext cx="0" cy="3826579"/>
             </a:xfrm>
             <a:custGeom>
@@ -2960,539 +2960,536 @@
           <p:spPr>
             <a:xfrm>
               <a:off x="1172049" y="1896563"/>
-              <a:ext cx="7090630" cy="3577394"/>
+              <a:ext cx="7090630" cy="3577160"/>
             </a:xfrm>
             <a:custGeom>
               <a:avLst/>
               <a:pathLst>
-                <a:path w="7090630" h="3577394">
+                <a:path w="7090630" h="3577160">
                   <a:moveTo>
-                    <a:pt x="0" y="2302969"/>
+                    <a:pt x="0" y="2303721"/>
                   </a:moveTo>
                   <a:lnTo>
-                    <a:pt x="71622" y="2315781"/>
-                  </a:lnTo>
-                  <a:lnTo>
-                    <a:pt x="143245" y="2328472"/>
-                  </a:lnTo>
-                  <a:lnTo>
-                    <a:pt x="214867" y="2341042"/>
-                  </a:lnTo>
-                  <a:lnTo>
-                    <a:pt x="286490" y="2353492"/>
-                  </a:lnTo>
-                  <a:lnTo>
-                    <a:pt x="358112" y="2365825"/>
-                  </a:lnTo>
-                  <a:lnTo>
-                    <a:pt x="429735" y="2378040"/>
-                  </a:lnTo>
-                  <a:lnTo>
-                    <a:pt x="501357" y="2390139"/>
-                  </a:lnTo>
-                  <a:lnTo>
-                    <a:pt x="572980" y="2402124"/>
-                  </a:lnTo>
-                  <a:lnTo>
-                    <a:pt x="644602" y="2413995"/>
-                  </a:lnTo>
-                  <a:lnTo>
-                    <a:pt x="716225" y="2425753"/>
-                  </a:lnTo>
-                  <a:lnTo>
-                    <a:pt x="787847" y="2437399"/>
-                  </a:lnTo>
-                  <a:lnTo>
-                    <a:pt x="859470" y="2448935"/>
-                  </a:lnTo>
-                  <a:lnTo>
-                    <a:pt x="931092" y="2460362"/>
-                  </a:lnTo>
-                  <a:lnTo>
-                    <a:pt x="1002715" y="2471680"/>
-                  </a:lnTo>
-                  <a:lnTo>
-                    <a:pt x="1074337" y="2482890"/>
-                  </a:lnTo>
-                  <a:lnTo>
-                    <a:pt x="1145960" y="2493994"/>
-                  </a:lnTo>
-                  <a:lnTo>
-                    <a:pt x="1217582" y="2504993"/>
-                  </a:lnTo>
-                  <a:lnTo>
-                    <a:pt x="1289205" y="2515887"/>
-                  </a:lnTo>
-                  <a:lnTo>
-                    <a:pt x="1360827" y="2526678"/>
-                  </a:lnTo>
-                  <a:lnTo>
-                    <a:pt x="1432450" y="2537367"/>
-                  </a:lnTo>
-                  <a:lnTo>
-                    <a:pt x="1504073" y="2547954"/>
-                  </a:lnTo>
-                  <a:lnTo>
-                    <a:pt x="1575695" y="2558440"/>
-                  </a:lnTo>
-                  <a:lnTo>
-                    <a:pt x="1647318" y="2568827"/>
-                  </a:lnTo>
-                  <a:lnTo>
-                    <a:pt x="1718940" y="2579115"/>
-                  </a:lnTo>
-                  <a:lnTo>
-                    <a:pt x="1790563" y="2589306"/>
-                  </a:lnTo>
-                  <a:lnTo>
-                    <a:pt x="1862185" y="2599400"/>
-                  </a:lnTo>
-                  <a:lnTo>
-                    <a:pt x="1933808" y="2609398"/>
-                  </a:lnTo>
-                  <a:lnTo>
-                    <a:pt x="2005430" y="2619301"/>
-                  </a:lnTo>
-                  <a:lnTo>
-                    <a:pt x="2077053" y="2629111"/>
-                  </a:lnTo>
-                  <a:lnTo>
-                    <a:pt x="2148675" y="2638827"/>
-                  </a:lnTo>
-                  <a:lnTo>
-                    <a:pt x="2220298" y="2648450"/>
-                  </a:lnTo>
-                  <a:lnTo>
-                    <a:pt x="2291920" y="2657983"/>
-                  </a:lnTo>
-                  <a:lnTo>
-                    <a:pt x="2363543" y="2667425"/>
-                  </a:lnTo>
-                  <a:lnTo>
-                    <a:pt x="2435165" y="2676777"/>
-                  </a:lnTo>
-                  <a:lnTo>
-                    <a:pt x="2506788" y="2686041"/>
-                  </a:lnTo>
-                  <a:lnTo>
-                    <a:pt x="2578410" y="2695217"/>
-                  </a:lnTo>
-                  <a:lnTo>
-                    <a:pt x="2650033" y="2704305"/>
-                  </a:lnTo>
-                  <a:lnTo>
-                    <a:pt x="2721655" y="2713307"/>
-                  </a:lnTo>
-                  <a:lnTo>
-                    <a:pt x="2793278" y="2722224"/>
-                  </a:lnTo>
-                  <a:lnTo>
-                    <a:pt x="2864901" y="2731056"/>
-                  </a:lnTo>
-                  <a:lnTo>
-                    <a:pt x="2936523" y="2739805"/>
-                  </a:lnTo>
-                  <a:lnTo>
-                    <a:pt x="3008146" y="2748470"/>
-                  </a:lnTo>
-                  <a:lnTo>
-                    <a:pt x="3079768" y="2757053"/>
-                  </a:lnTo>
-                  <a:lnTo>
-                    <a:pt x="3151391" y="2765555"/>
-                  </a:lnTo>
-                  <a:lnTo>
-                    <a:pt x="3223013" y="2773976"/>
-                  </a:lnTo>
-                  <a:lnTo>
-                    <a:pt x="3294636" y="2782316"/>
-                  </a:lnTo>
-                  <a:lnTo>
-                    <a:pt x="3366258" y="2739333"/>
-                  </a:lnTo>
-                  <a:lnTo>
-                    <a:pt x="3437881" y="2689514"/>
-                  </a:lnTo>
-                  <a:lnTo>
-                    <a:pt x="3509503" y="2636977"/>
-                  </a:lnTo>
-                  <a:lnTo>
-                    <a:pt x="3581126" y="2581575"/>
-                  </a:lnTo>
-                  <a:lnTo>
-                    <a:pt x="3652748" y="2523150"/>
-                  </a:lnTo>
-                  <a:lnTo>
-                    <a:pt x="3724371" y="2461539"/>
-                  </a:lnTo>
-                  <a:lnTo>
-                    <a:pt x="3795993" y="2396567"/>
-                  </a:lnTo>
-                  <a:lnTo>
-                    <a:pt x="3867616" y="2328050"/>
-                  </a:lnTo>
-                  <a:lnTo>
-                    <a:pt x="3939238" y="2255797"/>
-                  </a:lnTo>
-                  <a:lnTo>
-                    <a:pt x="4010861" y="2179602"/>
-                  </a:lnTo>
-                  <a:lnTo>
-                    <a:pt x="4082483" y="2099250"/>
-                  </a:lnTo>
-                  <a:lnTo>
-                    <a:pt x="4154106" y="2014516"/>
-                  </a:lnTo>
-                  <a:lnTo>
-                    <a:pt x="4225729" y="1925160"/>
-                  </a:lnTo>
-                  <a:lnTo>
-                    <a:pt x="4297351" y="1830929"/>
-                  </a:lnTo>
-                  <a:lnTo>
-                    <a:pt x="4368974" y="1731558"/>
-                  </a:lnTo>
-                  <a:lnTo>
-                    <a:pt x="4440596" y="1626767"/>
-                  </a:lnTo>
-                  <a:lnTo>
-                    <a:pt x="4512219" y="1516260"/>
-                  </a:lnTo>
-                  <a:lnTo>
-                    <a:pt x="4583841" y="1399725"/>
-                  </a:lnTo>
-                  <a:lnTo>
-                    <a:pt x="4655464" y="1276833"/>
-                  </a:lnTo>
-                  <a:lnTo>
-                    <a:pt x="4727086" y="1147237"/>
-                  </a:lnTo>
-                  <a:lnTo>
-                    <a:pt x="4798709" y="1010573"/>
-                  </a:lnTo>
-                  <a:lnTo>
-                    <a:pt x="4870331" y="866453"/>
-                  </a:lnTo>
-                  <a:lnTo>
-                    <a:pt x="4941954" y="714473"/>
-                  </a:lnTo>
-                  <a:lnTo>
-                    <a:pt x="5013576" y="554202"/>
-                  </a:lnTo>
-                  <a:lnTo>
-                    <a:pt x="5085199" y="385188"/>
-                  </a:lnTo>
-                  <a:lnTo>
-                    <a:pt x="5156821" y="206956"/>
-                  </a:lnTo>
-                  <a:lnTo>
-                    <a:pt x="5228444" y="19001"/>
-                  </a:lnTo>
-                  <a:lnTo>
-                    <a:pt x="5235310" y="0"/>
+                    <a:pt x="71622" y="2316543"/>
+                  </a:lnTo>
+                  <a:lnTo>
+                    <a:pt x="143245" y="2329242"/>
+                  </a:lnTo>
+                  <a:lnTo>
+                    <a:pt x="214867" y="2341821"/>
+                  </a:lnTo>
+                  <a:lnTo>
+                    <a:pt x="286490" y="2354280"/>
+                  </a:lnTo>
+                  <a:lnTo>
+                    <a:pt x="358112" y="2366621"/>
+                  </a:lnTo>
+                  <a:lnTo>
+                    <a:pt x="429735" y="2378845"/>
+                  </a:lnTo>
+                  <a:lnTo>
+                    <a:pt x="501357" y="2390952"/>
+                  </a:lnTo>
+                  <a:lnTo>
+                    <a:pt x="572980" y="2402945"/>
+                  </a:lnTo>
+                  <a:lnTo>
+                    <a:pt x="644602" y="2414823"/>
+                  </a:lnTo>
+                  <a:lnTo>
+                    <a:pt x="716225" y="2426589"/>
+                  </a:lnTo>
+                  <a:lnTo>
+                    <a:pt x="787847" y="2438242"/>
+                  </a:lnTo>
+                  <a:lnTo>
+                    <a:pt x="859470" y="2449785"/>
+                  </a:lnTo>
+                  <a:lnTo>
+                    <a:pt x="931092" y="2461218"/>
+                  </a:lnTo>
+                  <a:lnTo>
+                    <a:pt x="1002715" y="2472543"/>
+                  </a:lnTo>
+                  <a:lnTo>
+                    <a:pt x="1074337" y="2483760"/>
+                  </a:lnTo>
+                  <a:lnTo>
+                    <a:pt x="1145960" y="2494870"/>
+                  </a:lnTo>
+                  <a:lnTo>
+                    <a:pt x="1217582" y="2505874"/>
+                  </a:lnTo>
+                  <a:lnTo>
+                    <a:pt x="1289205" y="2516774"/>
+                  </a:lnTo>
+                  <a:lnTo>
+                    <a:pt x="1360827" y="2527571"/>
+                  </a:lnTo>
+                  <a:lnTo>
+                    <a:pt x="1432450" y="2538265"/>
+                  </a:lnTo>
+                  <a:lnTo>
+                    <a:pt x="1504073" y="2548857"/>
+                  </a:lnTo>
+                  <a:lnTo>
+                    <a:pt x="1575695" y="2559348"/>
+                  </a:lnTo>
+                  <a:lnTo>
+                    <a:pt x="1647318" y="2569740"/>
+                  </a:lnTo>
+                  <a:lnTo>
+                    <a:pt x="1718940" y="2580033"/>
+                  </a:lnTo>
+                  <a:lnTo>
+                    <a:pt x="1790563" y="2590228"/>
+                  </a:lnTo>
+                  <a:lnTo>
+                    <a:pt x="1862185" y="2600326"/>
+                  </a:lnTo>
+                  <a:lnTo>
+                    <a:pt x="1933808" y="2610329"/>
+                  </a:lnTo>
+                  <a:lnTo>
+                    <a:pt x="2005430" y="2620236"/>
+                  </a:lnTo>
+                  <a:lnTo>
+                    <a:pt x="2077053" y="2630049"/>
+                  </a:lnTo>
+                  <a:lnTo>
+                    <a:pt x="2148675" y="2639769"/>
+                  </a:lnTo>
+                  <a:lnTo>
+                    <a:pt x="2220298" y="2649396"/>
+                  </a:lnTo>
+                  <a:lnTo>
+                    <a:pt x="2291920" y="2658932"/>
+                  </a:lnTo>
+                  <a:lnTo>
+                    <a:pt x="2363543" y="2668377"/>
+                  </a:lnTo>
+                  <a:lnTo>
+                    <a:pt x="2435165" y="2677733"/>
+                  </a:lnTo>
+                  <a:lnTo>
+                    <a:pt x="2506788" y="2686999"/>
+                  </a:lnTo>
+                  <a:lnTo>
+                    <a:pt x="2578410" y="2696178"/>
+                  </a:lnTo>
+                  <a:lnTo>
+                    <a:pt x="2650033" y="2705269"/>
+                  </a:lnTo>
+                  <a:lnTo>
+                    <a:pt x="2721655" y="2714274"/>
+                  </a:lnTo>
+                  <a:lnTo>
+                    <a:pt x="2793278" y="2723193"/>
+                  </a:lnTo>
+                  <a:lnTo>
+                    <a:pt x="2864901" y="2732027"/>
+                  </a:lnTo>
+                  <a:lnTo>
+                    <a:pt x="2936523" y="2740778"/>
+                  </a:lnTo>
+                  <a:lnTo>
+                    <a:pt x="3008146" y="2749445"/>
+                  </a:lnTo>
+                  <a:lnTo>
+                    <a:pt x="3079768" y="2758030"/>
+                  </a:lnTo>
+                  <a:lnTo>
+                    <a:pt x="3151391" y="2766533"/>
+                  </a:lnTo>
+                  <a:lnTo>
+                    <a:pt x="3223013" y="2774956"/>
+                  </a:lnTo>
+                  <a:lnTo>
+                    <a:pt x="3294636" y="2781117"/>
+                  </a:lnTo>
+                  <a:lnTo>
+                    <a:pt x="3366258" y="2733513"/>
+                  </a:lnTo>
+                  <a:lnTo>
+                    <a:pt x="3437881" y="2683309"/>
+                  </a:lnTo>
+                  <a:lnTo>
+                    <a:pt x="3509503" y="2630363"/>
+                  </a:lnTo>
+                  <a:lnTo>
+                    <a:pt x="3581126" y="2574526"/>
+                  </a:lnTo>
+                  <a:lnTo>
+                    <a:pt x="3652748" y="2515638"/>
+                  </a:lnTo>
+                  <a:lnTo>
+                    <a:pt x="3724371" y="2453534"/>
+                  </a:lnTo>
+                  <a:lnTo>
+                    <a:pt x="3795993" y="2388037"/>
+                  </a:lnTo>
+                  <a:lnTo>
+                    <a:pt x="3867616" y="2318964"/>
+                  </a:lnTo>
+                  <a:lnTo>
+                    <a:pt x="3939238" y="2246117"/>
+                  </a:lnTo>
+                  <a:lnTo>
+                    <a:pt x="4010861" y="2169291"/>
+                  </a:lnTo>
+                  <a:lnTo>
+                    <a:pt x="4082483" y="2088269"/>
+                  </a:lnTo>
+                  <a:lnTo>
+                    <a:pt x="4154106" y="2002822"/>
+                  </a:lnTo>
+                  <a:lnTo>
+                    <a:pt x="4225729" y="1912707"/>
+                  </a:lnTo>
+                  <a:lnTo>
+                    <a:pt x="4297351" y="1817670"/>
+                  </a:lnTo>
+                  <a:lnTo>
+                    <a:pt x="4368974" y="1717442"/>
+                  </a:lnTo>
+                  <a:lnTo>
+                    <a:pt x="4440596" y="1611740"/>
+                  </a:lnTo>
+                  <a:lnTo>
+                    <a:pt x="4512219" y="1500264"/>
+                  </a:lnTo>
+                  <a:lnTo>
+                    <a:pt x="4583841" y="1382700"/>
+                  </a:lnTo>
+                  <a:lnTo>
+                    <a:pt x="4655464" y="1258713"/>
+                  </a:lnTo>
+                  <a:lnTo>
+                    <a:pt x="4727086" y="1127955"/>
+                  </a:lnTo>
+                  <a:lnTo>
+                    <a:pt x="4798709" y="990054"/>
+                  </a:lnTo>
+                  <a:lnTo>
+                    <a:pt x="4870331" y="844621"/>
+                  </a:lnTo>
+                  <a:lnTo>
+                    <a:pt x="4941954" y="691245"/>
+                  </a:lnTo>
+                  <a:lnTo>
+                    <a:pt x="5013576" y="529491"/>
+                  </a:lnTo>
+                  <a:lnTo>
+                    <a:pt x="5085199" y="358901"/>
+                  </a:lnTo>
+                  <a:lnTo>
+                    <a:pt x="5156821" y="178994"/>
+                  </a:lnTo>
+                  <a:lnTo>
+                    <a:pt x="5224390" y="0"/>
                   </a:lnTo>
                   <a:lnTo>
                     <a:pt x="7090630" y="0"/>
                   </a:lnTo>
                   <a:lnTo>
-                    <a:pt x="7090630" y="3127667"/>
-                  </a:lnTo>
-                  <a:lnTo>
-                    <a:pt x="7019007" y="3122636"/>
-                  </a:lnTo>
-                  <a:lnTo>
-                    <a:pt x="6947385" y="3117557"/>
-                  </a:lnTo>
-                  <a:lnTo>
-                    <a:pt x="6875762" y="3112428"/>
-                  </a:lnTo>
-                  <a:lnTo>
-                    <a:pt x="6804139" y="3107251"/>
-                  </a:lnTo>
-                  <a:lnTo>
-                    <a:pt x="6732517" y="3102024"/>
-                  </a:lnTo>
-                  <a:lnTo>
-                    <a:pt x="6660894" y="3096747"/>
-                  </a:lnTo>
-                  <a:lnTo>
-                    <a:pt x="6589272" y="3091420"/>
-                  </a:lnTo>
-                  <a:lnTo>
-                    <a:pt x="6517649" y="3086041"/>
-                  </a:lnTo>
-                  <a:lnTo>
-                    <a:pt x="6446027" y="3080611"/>
-                  </a:lnTo>
-                  <a:lnTo>
-                    <a:pt x="6374404" y="3075129"/>
-                  </a:lnTo>
-                  <a:lnTo>
-                    <a:pt x="6302782" y="3069594"/>
-                  </a:lnTo>
-                  <a:lnTo>
-                    <a:pt x="6231159" y="3064007"/>
-                  </a:lnTo>
-                  <a:lnTo>
-                    <a:pt x="6159537" y="3058365"/>
-                  </a:lnTo>
-                  <a:lnTo>
-                    <a:pt x="6087914" y="3052670"/>
-                  </a:lnTo>
-                  <a:lnTo>
-                    <a:pt x="6016292" y="3046920"/>
-                  </a:lnTo>
-                  <a:lnTo>
-                    <a:pt x="5944669" y="3041115"/>
-                  </a:lnTo>
-                  <a:lnTo>
-                    <a:pt x="5873047" y="3035254"/>
-                  </a:lnTo>
-                  <a:lnTo>
-                    <a:pt x="5801424" y="3029337"/>
-                  </a:lnTo>
-                  <a:lnTo>
-                    <a:pt x="5729802" y="3023364"/>
-                  </a:lnTo>
-                  <a:lnTo>
-                    <a:pt x="5658179" y="3017333"/>
-                  </a:lnTo>
-                  <a:lnTo>
-                    <a:pt x="5586557" y="3011244"/>
-                  </a:lnTo>
-                  <a:lnTo>
-                    <a:pt x="5514934" y="3005097"/>
-                  </a:lnTo>
-                  <a:lnTo>
-                    <a:pt x="5443311" y="2998892"/>
-                  </a:lnTo>
-                  <a:lnTo>
-                    <a:pt x="5371689" y="2992626"/>
-                  </a:lnTo>
-                  <a:lnTo>
-                    <a:pt x="5300066" y="2986301"/>
-                  </a:lnTo>
-                  <a:lnTo>
-                    <a:pt x="5228444" y="2979915"/>
-                  </a:lnTo>
-                  <a:lnTo>
-                    <a:pt x="5156821" y="2973468"/>
-                  </a:lnTo>
-                  <a:lnTo>
-                    <a:pt x="5085199" y="2966959"/>
-                  </a:lnTo>
-                  <a:lnTo>
-                    <a:pt x="5013576" y="2960387"/>
-                  </a:lnTo>
-                  <a:lnTo>
-                    <a:pt x="4941954" y="2953753"/>
-                  </a:lnTo>
-                  <a:lnTo>
-                    <a:pt x="4870331" y="2947055"/>
-                  </a:lnTo>
-                  <a:lnTo>
-                    <a:pt x="4798709" y="2940293"/>
-                  </a:lnTo>
-                  <a:lnTo>
-                    <a:pt x="4727086" y="2933466"/>
-                  </a:lnTo>
-                  <a:lnTo>
-                    <a:pt x="4655464" y="2926574"/>
-                  </a:lnTo>
-                  <a:lnTo>
-                    <a:pt x="4583841" y="2919615"/>
-                  </a:lnTo>
-                  <a:lnTo>
-                    <a:pt x="4512219" y="2912590"/>
-                  </a:lnTo>
-                  <a:lnTo>
-                    <a:pt x="4440596" y="2905498"/>
-                  </a:lnTo>
-                  <a:lnTo>
-                    <a:pt x="4368974" y="2898337"/>
-                  </a:lnTo>
-                  <a:lnTo>
-                    <a:pt x="4297351" y="2891108"/>
-                  </a:lnTo>
-                  <a:lnTo>
-                    <a:pt x="4225729" y="2883810"/>
-                  </a:lnTo>
-                  <a:lnTo>
-                    <a:pt x="4154106" y="2876442"/>
-                  </a:lnTo>
-                  <a:lnTo>
-                    <a:pt x="4082483" y="2869003"/>
-                  </a:lnTo>
-                  <a:lnTo>
-                    <a:pt x="4010861" y="2861493"/>
-                  </a:lnTo>
-                  <a:lnTo>
-                    <a:pt x="3939238" y="2853911"/>
-                  </a:lnTo>
-                  <a:lnTo>
-                    <a:pt x="3867616" y="2846256"/>
-                  </a:lnTo>
-                  <a:lnTo>
-                    <a:pt x="3795993" y="2838528"/>
-                  </a:lnTo>
-                  <a:lnTo>
-                    <a:pt x="3724371" y="2830725"/>
-                  </a:lnTo>
-                  <a:lnTo>
-                    <a:pt x="3652748" y="2822848"/>
-                  </a:lnTo>
-                  <a:lnTo>
-                    <a:pt x="3581126" y="2814896"/>
-                  </a:lnTo>
-                  <a:lnTo>
-                    <a:pt x="3509503" y="2806867"/>
-                  </a:lnTo>
-                  <a:lnTo>
-                    <a:pt x="3437881" y="2798762"/>
-                  </a:lnTo>
-                  <a:lnTo>
-                    <a:pt x="3366258" y="2790578"/>
-                  </a:lnTo>
-                  <a:lnTo>
-                    <a:pt x="3294636" y="2786575"/>
-                  </a:lnTo>
-                  <a:lnTo>
-                    <a:pt x="3223013" y="2831374"/>
-                  </a:lnTo>
-                  <a:lnTo>
-                    <a:pt x="3151391" y="2873855"/>
-                  </a:lnTo>
-                  <a:lnTo>
-                    <a:pt x="3079768" y="2914139"/>
-                  </a:lnTo>
-                  <a:lnTo>
-                    <a:pt x="3008146" y="2952339"/>
-                  </a:lnTo>
-                  <a:lnTo>
-                    <a:pt x="2936523" y="2988563"/>
-                  </a:lnTo>
-                  <a:lnTo>
-                    <a:pt x="2864901" y="3022914"/>
-                  </a:lnTo>
-                  <a:lnTo>
-                    <a:pt x="2793278" y="3055487"/>
-                  </a:lnTo>
-                  <a:lnTo>
-                    <a:pt x="2721655" y="3086376"/>
-                  </a:lnTo>
-                  <a:lnTo>
-                    <a:pt x="2650033" y="3115667"/>
-                  </a:lnTo>
-                  <a:lnTo>
-                    <a:pt x="2578410" y="3143443"/>
-                  </a:lnTo>
-                  <a:lnTo>
-                    <a:pt x="2506788" y="3169782"/>
-                  </a:lnTo>
-                  <a:lnTo>
-                    <a:pt x="2435165" y="3194758"/>
-                  </a:lnTo>
-                  <a:lnTo>
-                    <a:pt x="2363543" y="3218443"/>
-                  </a:lnTo>
-                  <a:lnTo>
-                    <a:pt x="2291920" y="3240903"/>
-                  </a:lnTo>
-                  <a:lnTo>
-                    <a:pt x="2220298" y="3262200"/>
-                  </a:lnTo>
-                  <a:lnTo>
-                    <a:pt x="2148675" y="3282397"/>
-                  </a:lnTo>
-                  <a:lnTo>
-                    <a:pt x="2077053" y="3301548"/>
-                  </a:lnTo>
-                  <a:lnTo>
-                    <a:pt x="2005430" y="3319709"/>
-                  </a:lnTo>
-                  <a:lnTo>
-                    <a:pt x="1933808" y="3336930"/>
-                  </a:lnTo>
-                  <a:lnTo>
-                    <a:pt x="1862185" y="3353261"/>
-                  </a:lnTo>
-                  <a:lnTo>
-                    <a:pt x="1790563" y="3368747"/>
-                  </a:lnTo>
-                  <a:lnTo>
-                    <a:pt x="1718940" y="3383432"/>
-                  </a:lnTo>
-                  <a:lnTo>
-                    <a:pt x="1647318" y="3397357"/>
-                  </a:lnTo>
-                  <a:lnTo>
-                    <a:pt x="1575695" y="3410562"/>
-                  </a:lnTo>
-                  <a:lnTo>
-                    <a:pt x="1504073" y="3423084"/>
-                  </a:lnTo>
-                  <a:lnTo>
-                    <a:pt x="1432450" y="3434958"/>
-                  </a:lnTo>
-                  <a:lnTo>
-                    <a:pt x="1360827" y="3446219"/>
-                  </a:lnTo>
-                  <a:lnTo>
-                    <a:pt x="1289205" y="3456896"/>
-                  </a:lnTo>
-                  <a:lnTo>
-                    <a:pt x="1217582" y="3467021"/>
-                  </a:lnTo>
-                  <a:lnTo>
-                    <a:pt x="1145960" y="3476623"/>
-                  </a:lnTo>
-                  <a:lnTo>
-                    <a:pt x="1074337" y="3485728"/>
-                  </a:lnTo>
-                  <a:lnTo>
-                    <a:pt x="1002715" y="3494362"/>
-                  </a:lnTo>
-                  <a:lnTo>
-                    <a:pt x="931092" y="3502549"/>
-                  </a:lnTo>
-                  <a:lnTo>
-                    <a:pt x="859470" y="3510313"/>
-                  </a:lnTo>
-                  <a:lnTo>
-                    <a:pt x="787847" y="3517675"/>
-                  </a:lnTo>
-                  <a:lnTo>
-                    <a:pt x="716225" y="3524657"/>
-                  </a:lnTo>
-                  <a:lnTo>
-                    <a:pt x="644602" y="3531277"/>
-                  </a:lnTo>
-                  <a:lnTo>
-                    <a:pt x="572980" y="3537555"/>
-                  </a:lnTo>
-                  <a:lnTo>
-                    <a:pt x="501357" y="3543508"/>
-                  </a:lnTo>
-                  <a:lnTo>
-                    <a:pt x="429735" y="3549153"/>
-                  </a:lnTo>
-                  <a:lnTo>
-                    <a:pt x="358112" y="3554506"/>
-                  </a:lnTo>
-                  <a:lnTo>
-                    <a:pt x="286490" y="3559582"/>
-                  </a:lnTo>
-                  <a:lnTo>
-                    <a:pt x="214867" y="3564396"/>
-                  </a:lnTo>
-                  <a:lnTo>
-                    <a:pt x="143245" y="3568961"/>
-                  </a:lnTo>
-                  <a:lnTo>
-                    <a:pt x="71622" y="3573289"/>
-                  </a:lnTo>
-                  <a:lnTo>
-                    <a:pt x="0" y="3577394"/>
+                    <a:pt x="7090630" y="3128604"/>
+                  </a:lnTo>
+                  <a:lnTo>
+                    <a:pt x="7019007" y="3123575"/>
+                  </a:lnTo>
+                  <a:lnTo>
+                    <a:pt x="6947385" y="3118498"/>
+                  </a:lnTo>
+                  <a:lnTo>
+                    <a:pt x="6875762" y="3113373"/>
+                  </a:lnTo>
+                  <a:lnTo>
+                    <a:pt x="6804139" y="3108198"/>
+                  </a:lnTo>
+                  <a:lnTo>
+                    <a:pt x="6732517" y="3102973"/>
+                  </a:lnTo>
+                  <a:lnTo>
+                    <a:pt x="6660894" y="3097698"/>
+                  </a:lnTo>
+                  <a:lnTo>
+                    <a:pt x="6589272" y="3092373"/>
+                  </a:lnTo>
+                  <a:lnTo>
+                    <a:pt x="6517649" y="3086996"/>
+                  </a:lnTo>
+                  <a:lnTo>
+                    <a:pt x="6446027" y="3081568"/>
+                  </a:lnTo>
+                  <a:lnTo>
+                    <a:pt x="6374404" y="3076088"/>
+                  </a:lnTo>
+                  <a:lnTo>
+                    <a:pt x="6302782" y="3070555"/>
+                  </a:lnTo>
+                  <a:lnTo>
+                    <a:pt x="6231159" y="3064970"/>
+                  </a:lnTo>
+                  <a:lnTo>
+                    <a:pt x="6159537" y="3059330"/>
+                  </a:lnTo>
+                  <a:lnTo>
+                    <a:pt x="6087914" y="3053637"/>
+                  </a:lnTo>
+                  <a:lnTo>
+                    <a:pt x="6016292" y="3047888"/>
+                  </a:lnTo>
+                  <a:lnTo>
+                    <a:pt x="5944669" y="3042085"/>
+                  </a:lnTo>
+                  <a:lnTo>
+                    <a:pt x="5873047" y="3036226"/>
+                  </a:lnTo>
+                  <a:lnTo>
+                    <a:pt x="5801424" y="3030311"/>
+                  </a:lnTo>
+                  <a:lnTo>
+                    <a:pt x="5729802" y="3024339"/>
+                  </a:lnTo>
+                  <a:lnTo>
+                    <a:pt x="5658179" y="3018309"/>
+                  </a:lnTo>
+                  <a:lnTo>
+                    <a:pt x="5586557" y="3012222"/>
+                  </a:lnTo>
+                  <a:lnTo>
+                    <a:pt x="5514934" y="3006077"/>
+                  </a:lnTo>
+                  <a:lnTo>
+                    <a:pt x="5443311" y="2999872"/>
+                  </a:lnTo>
+                  <a:lnTo>
+                    <a:pt x="5371689" y="2993608"/>
+                  </a:lnTo>
+                  <a:lnTo>
+                    <a:pt x="5300066" y="2987284"/>
+                  </a:lnTo>
+                  <a:lnTo>
+                    <a:pt x="5228444" y="2980899"/>
+                  </a:lnTo>
+                  <a:lnTo>
+                    <a:pt x="5156821" y="2974452"/>
+                  </a:lnTo>
+                  <a:lnTo>
+                    <a:pt x="5085199" y="2967944"/>
+                  </a:lnTo>
+                  <a:lnTo>
+                    <a:pt x="5013576" y="2961374"/>
+                  </a:lnTo>
+                  <a:lnTo>
+                    <a:pt x="4941954" y="2954740"/>
+                  </a:lnTo>
+                  <a:lnTo>
+                    <a:pt x="4870331" y="2948043"/>
+                  </a:lnTo>
+                  <a:lnTo>
+                    <a:pt x="4798709" y="2941282"/>
+                  </a:lnTo>
+                  <a:lnTo>
+                    <a:pt x="4727086" y="2934455"/>
+                  </a:lnTo>
+                  <a:lnTo>
+                    <a:pt x="4655464" y="2927563"/>
+                  </a:lnTo>
+                  <a:lnTo>
+                    <a:pt x="4583841" y="2920605"/>
+                  </a:lnTo>
+                  <a:lnTo>
+                    <a:pt x="4512219" y="2913581"/>
+                  </a:lnTo>
+                  <a:lnTo>
+                    <a:pt x="4440596" y="2906488"/>
+                  </a:lnTo>
+                  <a:lnTo>
+                    <a:pt x="4368974" y="2899328"/>
+                  </a:lnTo>
+                  <a:lnTo>
+                    <a:pt x="4297351" y="2892099"/>
+                  </a:lnTo>
+                  <a:lnTo>
+                    <a:pt x="4225729" y="2884801"/>
+                  </a:lnTo>
+                  <a:lnTo>
+                    <a:pt x="4154106" y="2877432"/>
+                  </a:lnTo>
+                  <a:lnTo>
+                    <a:pt x="4082483" y="2869993"/>
+                  </a:lnTo>
+                  <a:lnTo>
+                    <a:pt x="4010861" y="2862483"/>
+                  </a:lnTo>
+                  <a:lnTo>
+                    <a:pt x="3939238" y="2854900"/>
+                  </a:lnTo>
+                  <a:lnTo>
+                    <a:pt x="3867616" y="2847245"/>
+                  </a:lnTo>
+                  <a:lnTo>
+                    <a:pt x="3795993" y="2839516"/>
+                  </a:lnTo>
+                  <a:lnTo>
+                    <a:pt x="3724371" y="2831713"/>
+                  </a:lnTo>
+                  <a:lnTo>
+                    <a:pt x="3652748" y="2823836"/>
+                  </a:lnTo>
+                  <a:lnTo>
+                    <a:pt x="3581126" y="2815882"/>
+                  </a:lnTo>
+                  <a:lnTo>
+                    <a:pt x="3509503" y="2807852"/>
+                  </a:lnTo>
+                  <a:lnTo>
+                    <a:pt x="3437881" y="2799746"/>
+                  </a:lnTo>
+                  <a:lnTo>
+                    <a:pt x="3366258" y="2791561"/>
+                  </a:lnTo>
+                  <a:lnTo>
+                    <a:pt x="3294636" y="2783298"/>
+                  </a:lnTo>
+                  <a:lnTo>
+                    <a:pt x="3223013" y="2826255"/>
+                  </a:lnTo>
+                  <a:lnTo>
+                    <a:pt x="3151391" y="2869055"/>
+                  </a:lnTo>
+                  <a:lnTo>
+                    <a:pt x="3079768" y="2909638"/>
+                  </a:lnTo>
+                  <a:lnTo>
+                    <a:pt x="3008146" y="2948120"/>
+                  </a:lnTo>
+                  <a:lnTo>
+                    <a:pt x="2936523" y="2984609"/>
+                  </a:lnTo>
+                  <a:lnTo>
+                    <a:pt x="2864901" y="3019207"/>
+                  </a:lnTo>
+                  <a:lnTo>
+                    <a:pt x="2793278" y="3052014"/>
+                  </a:lnTo>
+                  <a:lnTo>
+                    <a:pt x="2721655" y="3083122"/>
+                  </a:lnTo>
+                  <a:lnTo>
+                    <a:pt x="2650033" y="3112619"/>
+                  </a:lnTo>
+                  <a:lnTo>
+                    <a:pt x="2578410" y="3140588"/>
+                  </a:lnTo>
+                  <a:lnTo>
+                    <a:pt x="2506788" y="3167108"/>
+                  </a:lnTo>
+                  <a:lnTo>
+                    <a:pt x="2435165" y="3192255"/>
+                  </a:lnTo>
+                  <a:lnTo>
+                    <a:pt x="2363543" y="3216099"/>
+                  </a:lnTo>
+                  <a:lnTo>
+                    <a:pt x="2291920" y="3238709"/>
+                  </a:lnTo>
+                  <a:lnTo>
+                    <a:pt x="2220298" y="3260147"/>
+                  </a:lnTo>
+                  <a:lnTo>
+                    <a:pt x="2148675" y="3280475"/>
+                  </a:lnTo>
+                  <a:lnTo>
+                    <a:pt x="2077053" y="3299751"/>
+                  </a:lnTo>
+                  <a:lnTo>
+                    <a:pt x="2005430" y="3318028"/>
+                  </a:lnTo>
+                  <a:lnTo>
+                    <a:pt x="1933808" y="3335358"/>
+                  </a:lnTo>
+                  <a:lnTo>
+                    <a:pt x="1862185" y="3351791"/>
+                  </a:lnTo>
+                  <a:lnTo>
+                    <a:pt x="1790563" y="3367373"/>
+                  </a:lnTo>
+                  <a:lnTo>
+                    <a:pt x="1718940" y="3382147"/>
+                  </a:lnTo>
+                  <a:lnTo>
+                    <a:pt x="1647318" y="3396157"/>
+                  </a:lnTo>
+                  <a:lnTo>
+                    <a:pt x="1575695" y="3409441"/>
+                  </a:lnTo>
+                  <a:lnTo>
+                    <a:pt x="1504073" y="3422037"/>
+                  </a:lnTo>
+                  <a:lnTo>
+                    <a:pt x="1432450" y="3433980"/>
+                  </a:lnTo>
+                  <a:lnTo>
+                    <a:pt x="1360827" y="3445305"/>
+                  </a:lnTo>
+                  <a:lnTo>
+                    <a:pt x="1289205" y="3456044"/>
+                  </a:lnTo>
+                  <a:lnTo>
+                    <a:pt x="1217582" y="3466226"/>
+                  </a:lnTo>
+                  <a:lnTo>
+                    <a:pt x="1145960" y="3475881"/>
+                  </a:lnTo>
+                  <a:lnTo>
+                    <a:pt x="1074337" y="3485036"/>
+                  </a:lnTo>
+                  <a:lnTo>
+                    <a:pt x="1002715" y="3493716"/>
+                  </a:lnTo>
+                  <a:lnTo>
+                    <a:pt x="931092" y="3501948"/>
+                  </a:lnTo>
+                  <a:lnTo>
+                    <a:pt x="859470" y="3509752"/>
+                  </a:lnTo>
+                  <a:lnTo>
+                    <a:pt x="787847" y="3517153"/>
+                  </a:lnTo>
+                  <a:lnTo>
+                    <a:pt x="716225" y="3524170"/>
+                  </a:lnTo>
+                  <a:lnTo>
+                    <a:pt x="644602" y="3530824"/>
+                  </a:lnTo>
+                  <a:lnTo>
+                    <a:pt x="572980" y="3537133"/>
+                  </a:lnTo>
+                  <a:lnTo>
+                    <a:pt x="501357" y="3543116"/>
+                  </a:lnTo>
+                  <a:lnTo>
+                    <a:pt x="429735" y="3548789"/>
+                  </a:lnTo>
+                  <a:lnTo>
+                    <a:pt x="358112" y="3554167"/>
+                  </a:lnTo>
+                  <a:lnTo>
+                    <a:pt x="286490" y="3559268"/>
+                  </a:lnTo>
+                  <a:lnTo>
+                    <a:pt x="214867" y="3564104"/>
+                  </a:lnTo>
+                  <a:lnTo>
+                    <a:pt x="143245" y="3568689"/>
+                  </a:lnTo>
+                  <a:lnTo>
+                    <a:pt x="71622" y="3573037"/>
+                  </a:lnTo>
+                  <a:lnTo>
+                    <a:pt x="0" y="3577160"/>
                   </a:lnTo>
                   <a:close/>
                 </a:path>
@@ -3519,236 +3516,233 @@
           <p:spPr>
             <a:xfrm>
               <a:off x="1172049" y="1896563"/>
-              <a:ext cx="5235310" cy="2782316"/>
+              <a:ext cx="5224390" cy="2781117"/>
             </a:xfrm>
             <a:custGeom>
               <a:avLst/>
               <a:pathLst>
-                <a:path w="5235310" h="2782316">
+                <a:path w="5224390" h="2781117">
                   <a:moveTo>
-                    <a:pt x="0" y="2302969"/>
+                    <a:pt x="0" y="2303721"/>
                   </a:moveTo>
                   <a:lnTo>
-                    <a:pt x="71622" y="2315781"/>
-                  </a:lnTo>
-                  <a:lnTo>
-                    <a:pt x="143245" y="2328472"/>
-                  </a:lnTo>
-                  <a:lnTo>
-                    <a:pt x="214867" y="2341042"/>
-                  </a:lnTo>
-                  <a:lnTo>
-                    <a:pt x="286490" y="2353492"/>
-                  </a:lnTo>
-                  <a:lnTo>
-                    <a:pt x="358112" y="2365825"/>
-                  </a:lnTo>
-                  <a:lnTo>
-                    <a:pt x="429735" y="2378040"/>
-                  </a:lnTo>
-                  <a:lnTo>
-                    <a:pt x="501357" y="2390139"/>
-                  </a:lnTo>
-                  <a:lnTo>
-                    <a:pt x="572980" y="2402124"/>
-                  </a:lnTo>
-                  <a:lnTo>
-                    <a:pt x="644602" y="2413995"/>
-                  </a:lnTo>
-                  <a:lnTo>
-                    <a:pt x="716225" y="2425753"/>
-                  </a:lnTo>
-                  <a:lnTo>
-                    <a:pt x="787847" y="2437399"/>
-                  </a:lnTo>
-                  <a:lnTo>
-                    <a:pt x="859470" y="2448935"/>
-                  </a:lnTo>
-                  <a:lnTo>
-                    <a:pt x="931092" y="2460362"/>
-                  </a:lnTo>
-                  <a:lnTo>
-                    <a:pt x="1002715" y="2471680"/>
-                  </a:lnTo>
-                  <a:lnTo>
-                    <a:pt x="1074337" y="2482890"/>
-                  </a:lnTo>
-                  <a:lnTo>
-                    <a:pt x="1145960" y="2493994"/>
-                  </a:lnTo>
-                  <a:lnTo>
-                    <a:pt x="1217582" y="2504993"/>
-                  </a:lnTo>
-                  <a:lnTo>
-                    <a:pt x="1289205" y="2515887"/>
-                  </a:lnTo>
-                  <a:lnTo>
-                    <a:pt x="1360827" y="2526678"/>
-                  </a:lnTo>
-                  <a:lnTo>
-                    <a:pt x="1432450" y="2537367"/>
-                  </a:lnTo>
-                  <a:lnTo>
-                    <a:pt x="1504073" y="2547954"/>
-                  </a:lnTo>
-                  <a:lnTo>
-                    <a:pt x="1575695" y="2558440"/>
-                  </a:lnTo>
-                  <a:lnTo>
-                    <a:pt x="1647318" y="2568827"/>
-                  </a:lnTo>
-                  <a:lnTo>
-                    <a:pt x="1718940" y="2579115"/>
-                  </a:lnTo>
-                  <a:lnTo>
-                    <a:pt x="1790563" y="2589306"/>
-                  </a:lnTo>
-                  <a:lnTo>
-                    <a:pt x="1862185" y="2599400"/>
-                  </a:lnTo>
-                  <a:lnTo>
-                    <a:pt x="1933808" y="2609398"/>
-                  </a:lnTo>
-                  <a:lnTo>
-                    <a:pt x="2005430" y="2619301"/>
-                  </a:lnTo>
-                  <a:lnTo>
-                    <a:pt x="2077053" y="2629111"/>
-                  </a:lnTo>
-                  <a:lnTo>
-                    <a:pt x="2148675" y="2638827"/>
-                  </a:lnTo>
-                  <a:lnTo>
-                    <a:pt x="2220298" y="2648450"/>
-                  </a:lnTo>
-                  <a:lnTo>
-                    <a:pt x="2291920" y="2657983"/>
-                  </a:lnTo>
-                  <a:lnTo>
-                    <a:pt x="2363543" y="2667425"/>
-                  </a:lnTo>
-                  <a:lnTo>
-                    <a:pt x="2435165" y="2676777"/>
-                  </a:lnTo>
-                  <a:lnTo>
-                    <a:pt x="2506788" y="2686041"/>
-                  </a:lnTo>
-                  <a:lnTo>
-                    <a:pt x="2578410" y="2695217"/>
-                  </a:lnTo>
-                  <a:lnTo>
-                    <a:pt x="2650033" y="2704305"/>
-                  </a:lnTo>
-                  <a:lnTo>
-                    <a:pt x="2721655" y="2713307"/>
-                  </a:lnTo>
-                  <a:lnTo>
-                    <a:pt x="2793278" y="2722224"/>
-                  </a:lnTo>
-                  <a:lnTo>
-                    <a:pt x="2864901" y="2731056"/>
-                  </a:lnTo>
-                  <a:lnTo>
-                    <a:pt x="2936523" y="2739805"/>
-                  </a:lnTo>
-                  <a:lnTo>
-                    <a:pt x="3008146" y="2748470"/>
-                  </a:lnTo>
-                  <a:lnTo>
-                    <a:pt x="3079768" y="2757053"/>
-                  </a:lnTo>
-                  <a:lnTo>
-                    <a:pt x="3151391" y="2765555"/>
-                  </a:lnTo>
-                  <a:lnTo>
-                    <a:pt x="3223013" y="2773976"/>
-                  </a:lnTo>
-                  <a:lnTo>
-                    <a:pt x="3294636" y="2782316"/>
-                  </a:lnTo>
-                  <a:lnTo>
-                    <a:pt x="3366258" y="2739333"/>
-                  </a:lnTo>
-                  <a:lnTo>
-                    <a:pt x="3437881" y="2689514"/>
-                  </a:lnTo>
-                  <a:lnTo>
-                    <a:pt x="3509503" y="2636977"/>
-                  </a:lnTo>
-                  <a:lnTo>
-                    <a:pt x="3581126" y="2581575"/>
-                  </a:lnTo>
-                  <a:lnTo>
-                    <a:pt x="3652748" y="2523150"/>
-                  </a:lnTo>
-                  <a:lnTo>
-                    <a:pt x="3724371" y="2461539"/>
-                  </a:lnTo>
-                  <a:lnTo>
-                    <a:pt x="3795993" y="2396567"/>
-                  </a:lnTo>
-                  <a:lnTo>
-                    <a:pt x="3867616" y="2328050"/>
-                  </a:lnTo>
-                  <a:lnTo>
-                    <a:pt x="3939238" y="2255797"/>
-                  </a:lnTo>
-                  <a:lnTo>
-                    <a:pt x="4010861" y="2179602"/>
-                  </a:lnTo>
-                  <a:lnTo>
-                    <a:pt x="4082483" y="2099250"/>
-                  </a:lnTo>
-                  <a:lnTo>
-                    <a:pt x="4154106" y="2014516"/>
-                  </a:lnTo>
-                  <a:lnTo>
-                    <a:pt x="4225729" y="1925160"/>
-                  </a:lnTo>
-                  <a:lnTo>
-                    <a:pt x="4297351" y="1830929"/>
-                  </a:lnTo>
-                  <a:lnTo>
-                    <a:pt x="4368974" y="1731558"/>
-                  </a:lnTo>
-                  <a:lnTo>
-                    <a:pt x="4440596" y="1626767"/>
-                  </a:lnTo>
-                  <a:lnTo>
-                    <a:pt x="4512219" y="1516260"/>
-                  </a:lnTo>
-                  <a:lnTo>
-                    <a:pt x="4583841" y="1399725"/>
-                  </a:lnTo>
-                  <a:lnTo>
-                    <a:pt x="4655464" y="1276833"/>
-                  </a:lnTo>
-                  <a:lnTo>
-                    <a:pt x="4727086" y="1147237"/>
-                  </a:lnTo>
-                  <a:lnTo>
-                    <a:pt x="4798709" y="1010573"/>
-                  </a:lnTo>
-                  <a:lnTo>
-                    <a:pt x="4870331" y="866453"/>
-                  </a:lnTo>
-                  <a:lnTo>
-                    <a:pt x="4941954" y="714473"/>
-                  </a:lnTo>
-                  <a:lnTo>
-                    <a:pt x="5013576" y="554202"/>
-                  </a:lnTo>
-                  <a:lnTo>
-                    <a:pt x="5085199" y="385188"/>
-                  </a:lnTo>
-                  <a:lnTo>
-                    <a:pt x="5156821" y="206956"/>
-                  </a:lnTo>
-                  <a:lnTo>
-                    <a:pt x="5228444" y="19001"/>
-                  </a:lnTo>
-                  <a:lnTo>
-                    <a:pt x="5235310" y="0"/>
+                    <a:pt x="71622" y="2316543"/>
+                  </a:lnTo>
+                  <a:lnTo>
+                    <a:pt x="143245" y="2329242"/>
+                  </a:lnTo>
+                  <a:lnTo>
+                    <a:pt x="214867" y="2341821"/>
+                  </a:lnTo>
+                  <a:lnTo>
+                    <a:pt x="286490" y="2354280"/>
+                  </a:lnTo>
+                  <a:lnTo>
+                    <a:pt x="358112" y="2366621"/>
+                  </a:lnTo>
+                  <a:lnTo>
+                    <a:pt x="429735" y="2378845"/>
+                  </a:lnTo>
+                  <a:lnTo>
+                    <a:pt x="501357" y="2390952"/>
+                  </a:lnTo>
+                  <a:lnTo>
+                    <a:pt x="572980" y="2402945"/>
+                  </a:lnTo>
+                  <a:lnTo>
+                    <a:pt x="644602" y="2414823"/>
+                  </a:lnTo>
+                  <a:lnTo>
+                    <a:pt x="716225" y="2426589"/>
+                  </a:lnTo>
+                  <a:lnTo>
+                    <a:pt x="787847" y="2438242"/>
+                  </a:lnTo>
+                  <a:lnTo>
+                    <a:pt x="859470" y="2449785"/>
+                  </a:lnTo>
+                  <a:lnTo>
+                    <a:pt x="931092" y="2461218"/>
+                  </a:lnTo>
+                  <a:lnTo>
+                    <a:pt x="1002715" y="2472543"/>
+                  </a:lnTo>
+                  <a:lnTo>
+                    <a:pt x="1074337" y="2483760"/>
+                  </a:lnTo>
+                  <a:lnTo>
+                    <a:pt x="1145960" y="2494870"/>
+                  </a:lnTo>
+                  <a:lnTo>
+                    <a:pt x="1217582" y="2505874"/>
+                  </a:lnTo>
+                  <a:lnTo>
+                    <a:pt x="1289205" y="2516774"/>
+                  </a:lnTo>
+                  <a:lnTo>
+                    <a:pt x="1360827" y="2527571"/>
+                  </a:lnTo>
+                  <a:lnTo>
+                    <a:pt x="1432450" y="2538265"/>
+                  </a:lnTo>
+                  <a:lnTo>
+                    <a:pt x="1504073" y="2548857"/>
+                  </a:lnTo>
+                  <a:lnTo>
+                    <a:pt x="1575695" y="2559348"/>
+                  </a:lnTo>
+                  <a:lnTo>
+                    <a:pt x="1647318" y="2569740"/>
+                  </a:lnTo>
+                  <a:lnTo>
+                    <a:pt x="1718940" y="2580033"/>
+                  </a:lnTo>
+                  <a:lnTo>
+                    <a:pt x="1790563" y="2590228"/>
+                  </a:lnTo>
+                  <a:lnTo>
+                    <a:pt x="1862185" y="2600326"/>
+                  </a:lnTo>
+                  <a:lnTo>
+                    <a:pt x="1933808" y="2610329"/>
+                  </a:lnTo>
+                  <a:lnTo>
+                    <a:pt x="2005430" y="2620236"/>
+                  </a:lnTo>
+                  <a:lnTo>
+                    <a:pt x="2077053" y="2630049"/>
+                  </a:lnTo>
+                  <a:lnTo>
+                    <a:pt x="2148675" y="2639769"/>
+                  </a:lnTo>
+                  <a:lnTo>
+                    <a:pt x="2220298" y="2649396"/>
+                  </a:lnTo>
+                  <a:lnTo>
+                    <a:pt x="2291920" y="2658932"/>
+                  </a:lnTo>
+                  <a:lnTo>
+                    <a:pt x="2363543" y="2668377"/>
+                  </a:lnTo>
+                  <a:lnTo>
+                    <a:pt x="2435165" y="2677733"/>
+                  </a:lnTo>
+                  <a:lnTo>
+                    <a:pt x="2506788" y="2686999"/>
+                  </a:lnTo>
+                  <a:lnTo>
+                    <a:pt x="2578410" y="2696178"/>
+                  </a:lnTo>
+                  <a:lnTo>
+                    <a:pt x="2650033" y="2705269"/>
+                  </a:lnTo>
+                  <a:lnTo>
+                    <a:pt x="2721655" y="2714274"/>
+                  </a:lnTo>
+                  <a:lnTo>
+                    <a:pt x="2793278" y="2723193"/>
+                  </a:lnTo>
+                  <a:lnTo>
+                    <a:pt x="2864901" y="2732027"/>
+                  </a:lnTo>
+                  <a:lnTo>
+                    <a:pt x="2936523" y="2740778"/>
+                  </a:lnTo>
+                  <a:lnTo>
+                    <a:pt x="3008146" y="2749445"/>
+                  </a:lnTo>
+                  <a:lnTo>
+                    <a:pt x="3079768" y="2758030"/>
+                  </a:lnTo>
+                  <a:lnTo>
+                    <a:pt x="3151391" y="2766533"/>
+                  </a:lnTo>
+                  <a:lnTo>
+                    <a:pt x="3223013" y="2774956"/>
+                  </a:lnTo>
+                  <a:lnTo>
+                    <a:pt x="3294636" y="2781117"/>
+                  </a:lnTo>
+                  <a:lnTo>
+                    <a:pt x="3366258" y="2733513"/>
+                  </a:lnTo>
+                  <a:lnTo>
+                    <a:pt x="3437881" y="2683309"/>
+                  </a:lnTo>
+                  <a:lnTo>
+                    <a:pt x="3509503" y="2630363"/>
+                  </a:lnTo>
+                  <a:lnTo>
+                    <a:pt x="3581126" y="2574526"/>
+                  </a:lnTo>
+                  <a:lnTo>
+                    <a:pt x="3652748" y="2515638"/>
+                  </a:lnTo>
+                  <a:lnTo>
+                    <a:pt x="3724371" y="2453534"/>
+                  </a:lnTo>
+                  <a:lnTo>
+                    <a:pt x="3795993" y="2388037"/>
+                  </a:lnTo>
+                  <a:lnTo>
+                    <a:pt x="3867616" y="2318964"/>
+                  </a:lnTo>
+                  <a:lnTo>
+                    <a:pt x="3939238" y="2246117"/>
+                  </a:lnTo>
+                  <a:lnTo>
+                    <a:pt x="4010861" y="2169291"/>
+                  </a:lnTo>
+                  <a:lnTo>
+                    <a:pt x="4082483" y="2088269"/>
+                  </a:lnTo>
+                  <a:lnTo>
+                    <a:pt x="4154106" y="2002822"/>
+                  </a:lnTo>
+                  <a:lnTo>
+                    <a:pt x="4225729" y="1912707"/>
+                  </a:lnTo>
+                  <a:lnTo>
+                    <a:pt x="4297351" y="1817670"/>
+                  </a:lnTo>
+                  <a:lnTo>
+                    <a:pt x="4368974" y="1717442"/>
+                  </a:lnTo>
+                  <a:lnTo>
+                    <a:pt x="4440596" y="1611740"/>
+                  </a:lnTo>
+                  <a:lnTo>
+                    <a:pt x="4512219" y="1500264"/>
+                  </a:lnTo>
+                  <a:lnTo>
+                    <a:pt x="4583841" y="1382700"/>
+                  </a:lnTo>
+                  <a:lnTo>
+                    <a:pt x="4655464" y="1258713"/>
+                  </a:lnTo>
+                  <a:lnTo>
+                    <a:pt x="4727086" y="1127955"/>
+                  </a:lnTo>
+                  <a:lnTo>
+                    <a:pt x="4798709" y="990054"/>
+                  </a:lnTo>
+                  <a:lnTo>
+                    <a:pt x="4870331" y="844621"/>
+                  </a:lnTo>
+                  <a:lnTo>
+                    <a:pt x="4941954" y="691245"/>
+                  </a:lnTo>
+                  <a:lnTo>
+                    <a:pt x="5013576" y="529491"/>
+                  </a:lnTo>
+                  <a:lnTo>
+                    <a:pt x="5085199" y="358901"/>
+                  </a:lnTo>
+                  <a:lnTo>
+                    <a:pt x="5156821" y="178994"/>
+                  </a:lnTo>
+                  <a:lnTo>
+                    <a:pt x="5224390" y="0"/>
                   </a:lnTo>
                 </a:path>
               </a:pathLst>
@@ -3768,312 +3762,312 @@
           </p:nvSpPr>
           <p:spPr>
             <a:xfrm>
-              <a:off x="1172049" y="4683139"/>
-              <a:ext cx="7090630" cy="790818"/>
+              <a:off x="1172049" y="4679861"/>
+              <a:ext cx="7090630" cy="793862"/>
             </a:xfrm>
             <a:custGeom>
               <a:avLst/>
               <a:pathLst>
-                <a:path w="7090630" h="790818">
+                <a:path w="7090630" h="793862">
                   <a:moveTo>
-                    <a:pt x="7090630" y="341091"/>
+                    <a:pt x="7090630" y="345306"/>
                   </a:moveTo>
                   <a:lnTo>
-                    <a:pt x="7019007" y="336060"/>
-                  </a:lnTo>
-                  <a:lnTo>
-                    <a:pt x="6947385" y="330981"/>
-                  </a:lnTo>
-                  <a:lnTo>
-                    <a:pt x="6875762" y="325853"/>
-                  </a:lnTo>
-                  <a:lnTo>
-                    <a:pt x="6804139" y="320675"/>
-                  </a:lnTo>
-                  <a:lnTo>
-                    <a:pt x="6732517" y="315449"/>
-                  </a:lnTo>
-                  <a:lnTo>
-                    <a:pt x="6660894" y="310172"/>
-                  </a:lnTo>
-                  <a:lnTo>
-                    <a:pt x="6589272" y="304844"/>
-                  </a:lnTo>
-                  <a:lnTo>
-                    <a:pt x="6517649" y="299466"/>
-                  </a:lnTo>
-                  <a:lnTo>
-                    <a:pt x="6446027" y="294035"/>
-                  </a:lnTo>
-                  <a:lnTo>
-                    <a:pt x="6374404" y="288553"/>
-                  </a:lnTo>
-                  <a:lnTo>
-                    <a:pt x="6302782" y="283019"/>
-                  </a:lnTo>
-                  <a:lnTo>
-                    <a:pt x="6231159" y="277431"/>
-                  </a:lnTo>
-                  <a:lnTo>
-                    <a:pt x="6159537" y="271790"/>
-                  </a:lnTo>
-                  <a:lnTo>
-                    <a:pt x="6087914" y="266094"/>
-                  </a:lnTo>
-                  <a:lnTo>
-                    <a:pt x="6016292" y="260344"/>
-                  </a:lnTo>
-                  <a:lnTo>
-                    <a:pt x="5944669" y="254539"/>
-                  </a:lnTo>
-                  <a:lnTo>
-                    <a:pt x="5873047" y="248678"/>
-                  </a:lnTo>
-                  <a:lnTo>
-                    <a:pt x="5801424" y="242762"/>
-                  </a:lnTo>
-                  <a:lnTo>
-                    <a:pt x="5729802" y="236788"/>
-                  </a:lnTo>
-                  <a:lnTo>
-                    <a:pt x="5658179" y="230757"/>
-                  </a:lnTo>
-                  <a:lnTo>
-                    <a:pt x="5586557" y="224669"/>
-                  </a:lnTo>
-                  <a:lnTo>
-                    <a:pt x="5514934" y="218522"/>
-                  </a:lnTo>
-                  <a:lnTo>
-                    <a:pt x="5443311" y="212316"/>
-                  </a:lnTo>
-                  <a:lnTo>
-                    <a:pt x="5371689" y="206051"/>
-                  </a:lnTo>
-                  <a:lnTo>
-                    <a:pt x="5300066" y="199725"/>
-                  </a:lnTo>
-                  <a:lnTo>
-                    <a:pt x="5228444" y="193339"/>
-                  </a:lnTo>
-                  <a:lnTo>
-                    <a:pt x="5156821" y="186892"/>
-                  </a:lnTo>
-                  <a:lnTo>
-                    <a:pt x="5085199" y="180383"/>
-                  </a:lnTo>
-                  <a:lnTo>
-                    <a:pt x="5013576" y="173812"/>
-                  </a:lnTo>
-                  <a:lnTo>
-                    <a:pt x="4941954" y="167177"/>
-                  </a:lnTo>
-                  <a:lnTo>
-                    <a:pt x="4870331" y="160479"/>
-                  </a:lnTo>
-                  <a:lnTo>
-                    <a:pt x="4798709" y="153717"/>
-                  </a:lnTo>
-                  <a:lnTo>
-                    <a:pt x="4727086" y="146890"/>
-                  </a:lnTo>
-                  <a:lnTo>
-                    <a:pt x="4655464" y="139998"/>
-                  </a:lnTo>
-                  <a:lnTo>
-                    <a:pt x="4583841" y="133039"/>
-                  </a:lnTo>
-                  <a:lnTo>
-                    <a:pt x="4512219" y="126014"/>
-                  </a:lnTo>
-                  <a:lnTo>
-                    <a:pt x="4440596" y="118922"/>
-                  </a:lnTo>
-                  <a:lnTo>
-                    <a:pt x="4368974" y="111762"/>
-                  </a:lnTo>
-                  <a:lnTo>
-                    <a:pt x="4297351" y="104532"/>
-                  </a:lnTo>
-                  <a:lnTo>
-                    <a:pt x="4225729" y="97234"/>
-                  </a:lnTo>
-                  <a:lnTo>
-                    <a:pt x="4154106" y="89866"/>
-                  </a:lnTo>
-                  <a:lnTo>
-                    <a:pt x="4082483" y="82427"/>
-                  </a:lnTo>
-                  <a:lnTo>
-                    <a:pt x="4010861" y="74917"/>
-                  </a:lnTo>
-                  <a:lnTo>
-                    <a:pt x="3939238" y="67335"/>
-                  </a:lnTo>
-                  <a:lnTo>
-                    <a:pt x="3867616" y="59680"/>
-                  </a:lnTo>
-                  <a:lnTo>
-                    <a:pt x="3795993" y="51952"/>
-                  </a:lnTo>
-                  <a:lnTo>
-                    <a:pt x="3724371" y="44150"/>
-                  </a:lnTo>
-                  <a:lnTo>
-                    <a:pt x="3652748" y="36273"/>
-                  </a:lnTo>
-                  <a:lnTo>
-                    <a:pt x="3581126" y="28320"/>
-                  </a:lnTo>
-                  <a:lnTo>
-                    <a:pt x="3509503" y="20291"/>
-                  </a:lnTo>
-                  <a:lnTo>
-                    <a:pt x="3437881" y="12186"/>
-                  </a:lnTo>
-                  <a:lnTo>
-                    <a:pt x="3366258" y="4003"/>
+                    <a:pt x="7019007" y="340277"/>
+                  </a:lnTo>
+                  <a:lnTo>
+                    <a:pt x="6947385" y="335200"/>
+                  </a:lnTo>
+                  <a:lnTo>
+                    <a:pt x="6875762" y="330074"/>
+                  </a:lnTo>
+                  <a:lnTo>
+                    <a:pt x="6804139" y="324899"/>
+                  </a:lnTo>
+                  <a:lnTo>
+                    <a:pt x="6732517" y="319674"/>
+                  </a:lnTo>
+                  <a:lnTo>
+                    <a:pt x="6660894" y="314400"/>
+                  </a:lnTo>
+                  <a:lnTo>
+                    <a:pt x="6589272" y="309074"/>
+                  </a:lnTo>
+                  <a:lnTo>
+                    <a:pt x="6517649" y="303698"/>
+                  </a:lnTo>
+                  <a:lnTo>
+                    <a:pt x="6446027" y="298270"/>
+                  </a:lnTo>
+                  <a:lnTo>
+                    <a:pt x="6374404" y="292790"/>
+                  </a:lnTo>
+                  <a:lnTo>
+                    <a:pt x="6302782" y="287257"/>
+                  </a:lnTo>
+                  <a:lnTo>
+                    <a:pt x="6231159" y="281671"/>
+                  </a:lnTo>
+                  <a:lnTo>
+                    <a:pt x="6159537" y="276032"/>
+                  </a:lnTo>
+                  <a:lnTo>
+                    <a:pt x="6087914" y="270338"/>
+                  </a:lnTo>
+                  <a:lnTo>
+                    <a:pt x="6016292" y="264590"/>
+                  </a:lnTo>
+                  <a:lnTo>
+                    <a:pt x="5944669" y="258787"/>
+                  </a:lnTo>
+                  <a:lnTo>
+                    <a:pt x="5873047" y="252928"/>
+                  </a:lnTo>
+                  <a:lnTo>
+                    <a:pt x="5801424" y="247012"/>
+                  </a:lnTo>
+                  <a:lnTo>
+                    <a:pt x="5729802" y="241040"/>
+                  </a:lnTo>
+                  <a:lnTo>
+                    <a:pt x="5658179" y="235011"/>
+                  </a:lnTo>
+                  <a:lnTo>
+                    <a:pt x="5586557" y="228924"/>
+                  </a:lnTo>
+                  <a:lnTo>
+                    <a:pt x="5514934" y="222778"/>
+                  </a:lnTo>
+                  <a:lnTo>
+                    <a:pt x="5443311" y="216574"/>
+                  </a:lnTo>
+                  <a:lnTo>
+                    <a:pt x="5371689" y="210309"/>
+                  </a:lnTo>
+                  <a:lnTo>
+                    <a:pt x="5300066" y="203985"/>
+                  </a:lnTo>
+                  <a:lnTo>
+                    <a:pt x="5228444" y="197600"/>
+                  </a:lnTo>
+                  <a:lnTo>
+                    <a:pt x="5156821" y="191154"/>
+                  </a:lnTo>
+                  <a:lnTo>
+                    <a:pt x="5085199" y="184646"/>
+                  </a:lnTo>
+                  <a:lnTo>
+                    <a:pt x="5013576" y="178075"/>
+                  </a:lnTo>
+                  <a:lnTo>
+                    <a:pt x="4941954" y="171442"/>
+                  </a:lnTo>
+                  <a:lnTo>
+                    <a:pt x="4870331" y="164745"/>
+                  </a:lnTo>
+                  <a:lnTo>
+                    <a:pt x="4798709" y="157983"/>
+                  </a:lnTo>
+                  <a:lnTo>
+                    <a:pt x="4727086" y="151157"/>
+                  </a:lnTo>
+                  <a:lnTo>
+                    <a:pt x="4655464" y="144265"/>
+                  </a:lnTo>
+                  <a:lnTo>
+                    <a:pt x="4583841" y="137307"/>
+                  </a:lnTo>
+                  <a:lnTo>
+                    <a:pt x="4512219" y="130282"/>
+                  </a:lnTo>
+                  <a:lnTo>
+                    <a:pt x="4440596" y="123190"/>
+                  </a:lnTo>
+                  <a:lnTo>
+                    <a:pt x="4368974" y="116030"/>
+                  </a:lnTo>
+                  <a:lnTo>
+                    <a:pt x="4297351" y="108801"/>
+                  </a:lnTo>
+                  <a:lnTo>
+                    <a:pt x="4225729" y="101502"/>
+                  </a:lnTo>
+                  <a:lnTo>
+                    <a:pt x="4154106" y="94134"/>
+                  </a:lnTo>
+                  <a:lnTo>
+                    <a:pt x="4082483" y="86695"/>
+                  </a:lnTo>
+                  <a:lnTo>
+                    <a:pt x="4010861" y="79184"/>
+                  </a:lnTo>
+                  <a:lnTo>
+                    <a:pt x="3939238" y="71602"/>
+                  </a:lnTo>
+                  <a:lnTo>
+                    <a:pt x="3867616" y="63947"/>
+                  </a:lnTo>
+                  <a:lnTo>
+                    <a:pt x="3795993" y="56218"/>
+                  </a:lnTo>
+                  <a:lnTo>
+                    <a:pt x="3724371" y="48415"/>
+                  </a:lnTo>
+                  <a:lnTo>
+                    <a:pt x="3652748" y="40537"/>
+                  </a:lnTo>
+                  <a:lnTo>
+                    <a:pt x="3581126" y="32584"/>
+                  </a:lnTo>
+                  <a:lnTo>
+                    <a:pt x="3509503" y="24554"/>
+                  </a:lnTo>
+                  <a:lnTo>
+                    <a:pt x="3437881" y="16447"/>
+                  </a:lnTo>
+                  <a:lnTo>
+                    <a:pt x="3366258" y="8263"/>
                   </a:lnTo>
                   <a:lnTo>
                     <a:pt x="3294636" y="0"/>
                   </a:lnTo>
                   <a:lnTo>
-                    <a:pt x="3223013" y="44798"/>
-                  </a:lnTo>
-                  <a:lnTo>
-                    <a:pt x="3151391" y="87279"/>
-                  </a:lnTo>
-                  <a:lnTo>
-                    <a:pt x="3079768" y="127563"/>
-                  </a:lnTo>
-                  <a:lnTo>
-                    <a:pt x="3008146" y="165763"/>
-                  </a:lnTo>
-                  <a:lnTo>
-                    <a:pt x="2936523" y="201987"/>
-                  </a:lnTo>
-                  <a:lnTo>
-                    <a:pt x="2864901" y="236338"/>
-                  </a:lnTo>
-                  <a:lnTo>
-                    <a:pt x="2793278" y="268911"/>
-                  </a:lnTo>
-                  <a:lnTo>
-                    <a:pt x="2721655" y="299800"/>
-                  </a:lnTo>
-                  <a:lnTo>
-                    <a:pt x="2650033" y="329091"/>
-                  </a:lnTo>
-                  <a:lnTo>
-                    <a:pt x="2578410" y="356867"/>
-                  </a:lnTo>
-                  <a:lnTo>
-                    <a:pt x="2506788" y="383206"/>
-                  </a:lnTo>
-                  <a:lnTo>
-                    <a:pt x="2435165" y="408183"/>
-                  </a:lnTo>
-                  <a:lnTo>
-                    <a:pt x="2363543" y="431867"/>
-                  </a:lnTo>
-                  <a:lnTo>
-                    <a:pt x="2291920" y="454327"/>
-                  </a:lnTo>
-                  <a:lnTo>
-                    <a:pt x="2220298" y="475625"/>
-                  </a:lnTo>
-                  <a:lnTo>
-                    <a:pt x="2148675" y="495821"/>
-                  </a:lnTo>
-                  <a:lnTo>
-                    <a:pt x="2077053" y="514972"/>
-                  </a:lnTo>
-                  <a:lnTo>
-                    <a:pt x="2005430" y="533133"/>
-                  </a:lnTo>
-                  <a:lnTo>
-                    <a:pt x="1933808" y="550355"/>
-                  </a:lnTo>
-                  <a:lnTo>
-                    <a:pt x="1862185" y="566685"/>
-                  </a:lnTo>
-                  <a:lnTo>
-                    <a:pt x="1790563" y="582171"/>
-                  </a:lnTo>
-                  <a:lnTo>
-                    <a:pt x="1718940" y="596856"/>
-                  </a:lnTo>
-                  <a:lnTo>
-                    <a:pt x="1647318" y="610782"/>
-                  </a:lnTo>
-                  <a:lnTo>
-                    <a:pt x="1575695" y="623987"/>
-                  </a:lnTo>
-                  <a:lnTo>
-                    <a:pt x="1504073" y="636509"/>
-                  </a:lnTo>
-                  <a:lnTo>
-                    <a:pt x="1432450" y="648383"/>
-                  </a:lnTo>
-                  <a:lnTo>
-                    <a:pt x="1360827" y="659643"/>
-                  </a:lnTo>
-                  <a:lnTo>
-                    <a:pt x="1289205" y="670320"/>
-                  </a:lnTo>
-                  <a:lnTo>
-                    <a:pt x="1217582" y="680446"/>
-                  </a:lnTo>
-                  <a:lnTo>
-                    <a:pt x="1145960" y="690047"/>
-                  </a:lnTo>
-                  <a:lnTo>
-                    <a:pt x="1074337" y="699152"/>
-                  </a:lnTo>
-                  <a:lnTo>
-                    <a:pt x="1002715" y="707786"/>
-                  </a:lnTo>
-                  <a:lnTo>
-                    <a:pt x="931092" y="715973"/>
-                  </a:lnTo>
-                  <a:lnTo>
-                    <a:pt x="859470" y="723737"/>
-                  </a:lnTo>
-                  <a:lnTo>
-                    <a:pt x="787847" y="731099"/>
-                  </a:lnTo>
-                  <a:lnTo>
-                    <a:pt x="716225" y="738081"/>
-                  </a:lnTo>
-                  <a:lnTo>
-                    <a:pt x="644602" y="744701"/>
-                  </a:lnTo>
-                  <a:lnTo>
-                    <a:pt x="572980" y="750979"/>
-                  </a:lnTo>
-                  <a:lnTo>
-                    <a:pt x="501357" y="756932"/>
-                  </a:lnTo>
-                  <a:lnTo>
-                    <a:pt x="429735" y="762577"/>
-                  </a:lnTo>
-                  <a:lnTo>
-                    <a:pt x="358112" y="767930"/>
-                  </a:lnTo>
-                  <a:lnTo>
-                    <a:pt x="286490" y="773007"/>
-                  </a:lnTo>
-                  <a:lnTo>
-                    <a:pt x="214867" y="777820"/>
-                  </a:lnTo>
-                  <a:lnTo>
-                    <a:pt x="143245" y="782385"/>
-                  </a:lnTo>
-                  <a:lnTo>
-                    <a:pt x="71622" y="786714"/>
-                  </a:lnTo>
-                  <a:lnTo>
-                    <a:pt x="0" y="790818"/>
+                    <a:pt x="3223013" y="42956"/>
+                  </a:lnTo>
+                  <a:lnTo>
+                    <a:pt x="3151391" y="85756"/>
+                  </a:lnTo>
+                  <a:lnTo>
+                    <a:pt x="3079768" y="126340"/>
+                  </a:lnTo>
+                  <a:lnTo>
+                    <a:pt x="3008146" y="164822"/>
+                  </a:lnTo>
+                  <a:lnTo>
+                    <a:pt x="2936523" y="201310"/>
+                  </a:lnTo>
+                  <a:lnTo>
+                    <a:pt x="2864901" y="235909"/>
+                  </a:lnTo>
+                  <a:lnTo>
+                    <a:pt x="2793278" y="268716"/>
+                  </a:lnTo>
+                  <a:lnTo>
+                    <a:pt x="2721655" y="299824"/>
+                  </a:lnTo>
+                  <a:lnTo>
+                    <a:pt x="2650033" y="329320"/>
+                  </a:lnTo>
+                  <a:lnTo>
+                    <a:pt x="2578410" y="357289"/>
+                  </a:lnTo>
+                  <a:lnTo>
+                    <a:pt x="2506788" y="383810"/>
+                  </a:lnTo>
+                  <a:lnTo>
+                    <a:pt x="2435165" y="408956"/>
+                  </a:lnTo>
+                  <a:lnTo>
+                    <a:pt x="2363543" y="432801"/>
+                  </a:lnTo>
+                  <a:lnTo>
+                    <a:pt x="2291920" y="455410"/>
+                  </a:lnTo>
+                  <a:lnTo>
+                    <a:pt x="2220298" y="476849"/>
+                  </a:lnTo>
+                  <a:lnTo>
+                    <a:pt x="2148675" y="497177"/>
+                  </a:lnTo>
+                  <a:lnTo>
+                    <a:pt x="2077053" y="516452"/>
+                  </a:lnTo>
+                  <a:lnTo>
+                    <a:pt x="2005430" y="534729"/>
+                  </a:lnTo>
+                  <a:lnTo>
+                    <a:pt x="1933808" y="552060"/>
+                  </a:lnTo>
+                  <a:lnTo>
+                    <a:pt x="1862185" y="568492"/>
+                  </a:lnTo>
+                  <a:lnTo>
+                    <a:pt x="1790563" y="584074"/>
+                  </a:lnTo>
+                  <a:lnTo>
+                    <a:pt x="1718940" y="598849"/>
+                  </a:lnTo>
+                  <a:lnTo>
+                    <a:pt x="1647318" y="612858"/>
+                  </a:lnTo>
+                  <a:lnTo>
+                    <a:pt x="1575695" y="626142"/>
+                  </a:lnTo>
+                  <a:lnTo>
+                    <a:pt x="1504073" y="638738"/>
+                  </a:lnTo>
+                  <a:lnTo>
+                    <a:pt x="1432450" y="650682"/>
+                  </a:lnTo>
+                  <a:lnTo>
+                    <a:pt x="1360827" y="662007"/>
+                  </a:lnTo>
+                  <a:lnTo>
+                    <a:pt x="1289205" y="672745"/>
+                  </a:lnTo>
+                  <a:lnTo>
+                    <a:pt x="1217582" y="682927"/>
+                  </a:lnTo>
+                  <a:lnTo>
+                    <a:pt x="1145960" y="692582"/>
+                  </a:lnTo>
+                  <a:lnTo>
+                    <a:pt x="1074337" y="701737"/>
+                  </a:lnTo>
+                  <a:lnTo>
+                    <a:pt x="1002715" y="710418"/>
+                  </a:lnTo>
+                  <a:lnTo>
+                    <a:pt x="931092" y="718649"/>
+                  </a:lnTo>
+                  <a:lnTo>
+                    <a:pt x="859470" y="726454"/>
+                  </a:lnTo>
+                  <a:lnTo>
+                    <a:pt x="787847" y="733854"/>
+                  </a:lnTo>
+                  <a:lnTo>
+                    <a:pt x="716225" y="740872"/>
+                  </a:lnTo>
+                  <a:lnTo>
+                    <a:pt x="644602" y="747526"/>
+                  </a:lnTo>
+                  <a:lnTo>
+                    <a:pt x="572980" y="753835"/>
+                  </a:lnTo>
+                  <a:lnTo>
+                    <a:pt x="501357" y="759817"/>
+                  </a:lnTo>
+                  <a:lnTo>
+                    <a:pt x="429735" y="765490"/>
+                  </a:lnTo>
+                  <a:lnTo>
+                    <a:pt x="358112" y="770869"/>
+                  </a:lnTo>
+                  <a:lnTo>
+                    <a:pt x="286490" y="775969"/>
+                  </a:lnTo>
+                  <a:lnTo>
+                    <a:pt x="214867" y="780805"/>
+                  </a:lnTo>
+                  <a:lnTo>
+                    <a:pt x="143245" y="785391"/>
+                  </a:lnTo>
+                  <a:lnTo>
+                    <a:pt x="71622" y="789739"/>
+                  </a:lnTo>
+                  <a:lnTo>
+                    <a:pt x="0" y="793862"/>
                   </a:lnTo>
                 </a:path>
               </a:pathLst>
@@ -4093,309 +4087,309 @@
           </p:nvSpPr>
           <p:spPr>
             <a:xfrm>
-              <a:off x="1172049" y="2794326"/>
-              <a:ext cx="7090630" cy="2436193"/>
+              <a:off x="1172049" y="2783057"/>
+              <a:ext cx="7090630" cy="2447056"/>
             </a:xfrm>
             <a:custGeom>
               <a:avLst/>
               <a:pathLst>
-                <a:path w="7090630" h="2436193">
+                <a:path w="7090630" h="2447056">
                   <a:moveTo>
-                    <a:pt x="0" y="2436193"/>
+                    <a:pt x="0" y="2447056"/>
                   </a:moveTo>
                   <a:lnTo>
-                    <a:pt x="71622" y="2429173"/>
-                  </a:lnTo>
-                  <a:lnTo>
-                    <a:pt x="143245" y="2421999"/>
-                  </a:lnTo>
-                  <a:lnTo>
-                    <a:pt x="214867" y="2414667"/>
-                  </a:lnTo>
-                  <a:lnTo>
-                    <a:pt x="286490" y="2407173"/>
-                  </a:lnTo>
-                  <a:lnTo>
-                    <a:pt x="358112" y="2399515"/>
-                  </a:lnTo>
-                  <a:lnTo>
-                    <a:pt x="429735" y="2391687"/>
-                  </a:lnTo>
-                  <a:lnTo>
-                    <a:pt x="501357" y="2383688"/>
-                  </a:lnTo>
-                  <a:lnTo>
-                    <a:pt x="572980" y="2375512"/>
-                  </a:lnTo>
-                  <a:lnTo>
-                    <a:pt x="644602" y="2367156"/>
-                  </a:lnTo>
-                  <a:lnTo>
-                    <a:pt x="716225" y="2358616"/>
-                  </a:lnTo>
-                  <a:lnTo>
-                    <a:pt x="787847" y="2349888"/>
-                  </a:lnTo>
-                  <a:lnTo>
-                    <a:pt x="859470" y="2340967"/>
-                  </a:lnTo>
-                  <a:lnTo>
-                    <a:pt x="931092" y="2331850"/>
-                  </a:lnTo>
-                  <a:lnTo>
-                    <a:pt x="1002715" y="2322533"/>
-                  </a:lnTo>
-                  <a:lnTo>
-                    <a:pt x="1074337" y="2313010"/>
-                  </a:lnTo>
-                  <a:lnTo>
-                    <a:pt x="1145960" y="2303277"/>
-                  </a:lnTo>
-                  <a:lnTo>
-                    <a:pt x="1217582" y="2293330"/>
-                  </a:lnTo>
-                  <a:lnTo>
-                    <a:pt x="1289205" y="2283164"/>
-                  </a:lnTo>
-                  <a:lnTo>
-                    <a:pt x="1360827" y="2272774"/>
-                  </a:lnTo>
-                  <a:lnTo>
-                    <a:pt x="1432450" y="2262155"/>
-                  </a:lnTo>
-                  <a:lnTo>
-                    <a:pt x="1504073" y="2251302"/>
-                  </a:lnTo>
-                  <a:lnTo>
-                    <a:pt x="1575695" y="2240210"/>
-                  </a:lnTo>
-                  <a:lnTo>
-                    <a:pt x="1647318" y="2228874"/>
-                  </a:lnTo>
-                  <a:lnTo>
-                    <a:pt x="1718940" y="2217288"/>
-                  </a:lnTo>
-                  <a:lnTo>
-                    <a:pt x="1790563" y="2205447"/>
-                  </a:lnTo>
-                  <a:lnTo>
-                    <a:pt x="1862185" y="2193345"/>
-                  </a:lnTo>
-                  <a:lnTo>
-                    <a:pt x="1933808" y="2180976"/>
-                  </a:lnTo>
-                  <a:lnTo>
-                    <a:pt x="2005430" y="2168336"/>
-                  </a:lnTo>
-                  <a:lnTo>
-                    <a:pt x="2077053" y="2155416"/>
-                  </a:lnTo>
-                  <a:lnTo>
-                    <a:pt x="2148675" y="2142212"/>
-                  </a:lnTo>
-                  <a:lnTo>
-                    <a:pt x="2220298" y="2128718"/>
-                  </a:lnTo>
-                  <a:lnTo>
-                    <a:pt x="2291920" y="2114926"/>
-                  </a:lnTo>
-                  <a:lnTo>
-                    <a:pt x="2363543" y="2100830"/>
-                  </a:lnTo>
-                  <a:lnTo>
-                    <a:pt x="2435165" y="2086424"/>
-                  </a:lnTo>
-                  <a:lnTo>
-                    <a:pt x="2506788" y="2071700"/>
-                  </a:lnTo>
-                  <a:lnTo>
-                    <a:pt x="2578410" y="2056652"/>
-                  </a:lnTo>
-                  <a:lnTo>
-                    <a:pt x="2650033" y="2041273"/>
-                  </a:lnTo>
-                  <a:lnTo>
-                    <a:pt x="2721655" y="2025555"/>
-                  </a:lnTo>
-                  <a:lnTo>
-                    <a:pt x="2793278" y="2009491"/>
-                  </a:lnTo>
-                  <a:lnTo>
-                    <a:pt x="2864901" y="1993073"/>
-                  </a:lnTo>
-                  <a:lnTo>
-                    <a:pt x="2936523" y="1976293"/>
-                  </a:lnTo>
-                  <a:lnTo>
-                    <a:pt x="3008146" y="1959144"/>
-                  </a:lnTo>
-                  <a:lnTo>
-                    <a:pt x="3079768" y="1941617"/>
-                  </a:lnTo>
-                  <a:lnTo>
-                    <a:pt x="3151391" y="1923704"/>
-                  </a:lnTo>
-                  <a:lnTo>
-                    <a:pt x="3223013" y="1905396"/>
-                  </a:lnTo>
-                  <a:lnTo>
-                    <a:pt x="3294636" y="1886686"/>
-                  </a:lnTo>
-                  <a:lnTo>
-                    <a:pt x="3366258" y="1867563"/>
-                  </a:lnTo>
-                  <a:lnTo>
-                    <a:pt x="3437881" y="1848019"/>
-                  </a:lnTo>
-                  <a:lnTo>
-                    <a:pt x="3509503" y="1828044"/>
-                  </a:lnTo>
-                  <a:lnTo>
-                    <a:pt x="3581126" y="1807629"/>
-                  </a:lnTo>
-                  <a:lnTo>
-                    <a:pt x="3652748" y="1786765"/>
-                  </a:lnTo>
-                  <a:lnTo>
-                    <a:pt x="3724371" y="1765441"/>
-                  </a:lnTo>
-                  <a:lnTo>
-                    <a:pt x="3795993" y="1743648"/>
-                  </a:lnTo>
-                  <a:lnTo>
-                    <a:pt x="3867616" y="1721374"/>
-                  </a:lnTo>
-                  <a:lnTo>
-                    <a:pt x="3939238" y="1698610"/>
-                  </a:lnTo>
-                  <a:lnTo>
-                    <a:pt x="4010861" y="1675344"/>
-                  </a:lnTo>
-                  <a:lnTo>
-                    <a:pt x="4082483" y="1651566"/>
-                  </a:lnTo>
-                  <a:lnTo>
-                    <a:pt x="4154106" y="1627265"/>
-                  </a:lnTo>
-                  <a:lnTo>
-                    <a:pt x="4225729" y="1602428"/>
-                  </a:lnTo>
-                  <a:lnTo>
-                    <a:pt x="4297351" y="1577044"/>
-                  </a:lnTo>
-                  <a:lnTo>
-                    <a:pt x="4368974" y="1551101"/>
-                  </a:lnTo>
-                  <a:lnTo>
-                    <a:pt x="4440596" y="1524586"/>
-                  </a:lnTo>
-                  <a:lnTo>
-                    <a:pt x="4512219" y="1497487"/>
-                  </a:lnTo>
-                  <a:lnTo>
-                    <a:pt x="4583841" y="1469792"/>
-                  </a:lnTo>
-                  <a:lnTo>
-                    <a:pt x="4655464" y="1441486"/>
-                  </a:lnTo>
-                  <a:lnTo>
-                    <a:pt x="4727086" y="1412557"/>
-                  </a:lnTo>
-                  <a:lnTo>
-                    <a:pt x="4798709" y="1382991"/>
-                  </a:lnTo>
-                  <a:lnTo>
-                    <a:pt x="4870331" y="1352774"/>
-                  </a:lnTo>
-                  <a:lnTo>
-                    <a:pt x="4941954" y="1321891"/>
-                  </a:lnTo>
-                  <a:lnTo>
-                    <a:pt x="5013576" y="1290328"/>
-                  </a:lnTo>
-                  <a:lnTo>
-                    <a:pt x="5085199" y="1258069"/>
-                  </a:lnTo>
-                  <a:lnTo>
-                    <a:pt x="5156821" y="1225100"/>
-                  </a:lnTo>
-                  <a:lnTo>
-                    <a:pt x="5228444" y="1191405"/>
-                  </a:lnTo>
-                  <a:lnTo>
-                    <a:pt x="5300066" y="1156968"/>
-                  </a:lnTo>
-                  <a:lnTo>
-                    <a:pt x="5371689" y="1121772"/>
-                  </a:lnTo>
-                  <a:lnTo>
-                    <a:pt x="5443311" y="1085801"/>
-                  </a:lnTo>
-                  <a:lnTo>
-                    <a:pt x="5514934" y="1049038"/>
-                  </a:lnTo>
-                  <a:lnTo>
-                    <a:pt x="5586557" y="1011465"/>
-                  </a:lnTo>
-                  <a:lnTo>
-                    <a:pt x="5658179" y="973064"/>
-                  </a:lnTo>
-                  <a:lnTo>
-                    <a:pt x="5729802" y="933817"/>
-                  </a:lnTo>
-                  <a:lnTo>
-                    <a:pt x="5801424" y="893707"/>
-                  </a:lnTo>
-                  <a:lnTo>
-                    <a:pt x="5873047" y="852712"/>
-                  </a:lnTo>
-                  <a:lnTo>
-                    <a:pt x="5944669" y="810815"/>
-                  </a:lnTo>
-                  <a:lnTo>
-                    <a:pt x="6016292" y="767995"/>
-                  </a:lnTo>
-                  <a:lnTo>
-                    <a:pt x="6087914" y="724231"/>
-                  </a:lnTo>
-                  <a:lnTo>
-                    <a:pt x="6159537" y="679504"/>
-                  </a:lnTo>
-                  <a:lnTo>
-                    <a:pt x="6231159" y="633791"/>
-                  </a:lnTo>
-                  <a:lnTo>
-                    <a:pt x="6302782" y="587072"/>
-                  </a:lnTo>
-                  <a:lnTo>
-                    <a:pt x="6374404" y="539324"/>
-                  </a:lnTo>
-                  <a:lnTo>
-                    <a:pt x="6446027" y="490523"/>
-                  </a:lnTo>
-                  <a:lnTo>
-                    <a:pt x="6517649" y="440648"/>
-                  </a:lnTo>
-                  <a:lnTo>
-                    <a:pt x="6589272" y="389675"/>
-                  </a:lnTo>
-                  <a:lnTo>
-                    <a:pt x="6660894" y="337579"/>
-                  </a:lnTo>
-                  <a:lnTo>
-                    <a:pt x="6732517" y="284335"/>
-                  </a:lnTo>
-                  <a:lnTo>
-                    <a:pt x="6804139" y="229918"/>
-                  </a:lnTo>
-                  <a:lnTo>
-                    <a:pt x="6875762" y="174303"/>
-                  </a:lnTo>
-                  <a:lnTo>
-                    <a:pt x="6947385" y="117463"/>
-                  </a:lnTo>
-                  <a:lnTo>
-                    <a:pt x="7019007" y="59371"/>
+                    <a:pt x="71622" y="2440018"/>
+                  </a:lnTo>
+                  <a:lnTo>
+                    <a:pt x="143245" y="2432825"/>
+                  </a:lnTo>
+                  <a:lnTo>
+                    <a:pt x="214867" y="2425474"/>
+                  </a:lnTo>
+                  <a:lnTo>
+                    <a:pt x="286490" y="2417960"/>
+                  </a:lnTo>
+                  <a:lnTo>
+                    <a:pt x="358112" y="2410281"/>
+                  </a:lnTo>
+                  <a:lnTo>
+                    <a:pt x="429735" y="2402432"/>
+                  </a:lnTo>
+                  <a:lnTo>
+                    <a:pt x="501357" y="2394410"/>
+                  </a:lnTo>
+                  <a:lnTo>
+                    <a:pt x="572980" y="2386211"/>
+                  </a:lnTo>
+                  <a:lnTo>
+                    <a:pt x="644602" y="2377832"/>
+                  </a:lnTo>
+                  <a:lnTo>
+                    <a:pt x="716225" y="2369267"/>
+                  </a:lnTo>
+                  <a:lnTo>
+                    <a:pt x="787847" y="2360514"/>
+                  </a:lnTo>
+                  <a:lnTo>
+                    <a:pt x="859470" y="2351568"/>
+                  </a:lnTo>
+                  <a:lnTo>
+                    <a:pt x="931092" y="2342424"/>
+                  </a:lnTo>
+                  <a:lnTo>
+                    <a:pt x="1002715" y="2333079"/>
+                  </a:lnTo>
+                  <a:lnTo>
+                    <a:pt x="1074337" y="2323527"/>
+                  </a:lnTo>
+                  <a:lnTo>
+                    <a:pt x="1145960" y="2313765"/>
+                  </a:lnTo>
+                  <a:lnTo>
+                    <a:pt x="1217582" y="2303788"/>
+                  </a:lnTo>
+                  <a:lnTo>
+                    <a:pt x="1289205" y="2293590"/>
+                  </a:lnTo>
+                  <a:lnTo>
+                    <a:pt x="1360827" y="2283168"/>
+                  </a:lnTo>
+                  <a:lnTo>
+                    <a:pt x="1432450" y="2272516"/>
+                  </a:lnTo>
+                  <a:lnTo>
+                    <a:pt x="1504073" y="2261629"/>
+                  </a:lnTo>
+                  <a:lnTo>
+                    <a:pt x="1575695" y="2250502"/>
+                  </a:lnTo>
+                  <a:lnTo>
+                    <a:pt x="1647318" y="2239129"/>
+                  </a:lnTo>
+                  <a:lnTo>
+                    <a:pt x="1718940" y="2227505"/>
+                  </a:lnTo>
+                  <a:lnTo>
+                    <a:pt x="1790563" y="2215626"/>
+                  </a:lnTo>
+                  <a:lnTo>
+                    <a:pt x="1862185" y="2203484"/>
+                  </a:lnTo>
+                  <a:lnTo>
+                    <a:pt x="1933808" y="2191074"/>
+                  </a:lnTo>
+                  <a:lnTo>
+                    <a:pt x="2005430" y="2178391"/>
+                  </a:lnTo>
+                  <a:lnTo>
+                    <a:pt x="2077053" y="2165428"/>
+                  </a:lnTo>
+                  <a:lnTo>
+                    <a:pt x="2148675" y="2152179"/>
+                  </a:lnTo>
+                  <a:lnTo>
+                    <a:pt x="2220298" y="2138637"/>
+                  </a:lnTo>
+                  <a:lnTo>
+                    <a:pt x="2291920" y="2124798"/>
+                  </a:lnTo>
+                  <a:lnTo>
+                    <a:pt x="2363543" y="2110652"/>
+                  </a:lnTo>
+                  <a:lnTo>
+                    <a:pt x="2435165" y="2096195"/>
+                  </a:lnTo>
+                  <a:lnTo>
+                    <a:pt x="2506788" y="2081419"/>
+                  </a:lnTo>
+                  <a:lnTo>
+                    <a:pt x="2578410" y="2066318"/>
+                  </a:lnTo>
+                  <a:lnTo>
+                    <a:pt x="2650033" y="2050883"/>
+                  </a:lnTo>
+                  <a:lnTo>
+                    <a:pt x="2721655" y="2035108"/>
+                  </a:lnTo>
+                  <a:lnTo>
+                    <a:pt x="2793278" y="2018984"/>
+                  </a:lnTo>
+                  <a:lnTo>
+                    <a:pt x="2864901" y="2002506"/>
+                  </a:lnTo>
+                  <a:lnTo>
+                    <a:pt x="2936523" y="1985663"/>
+                  </a:lnTo>
+                  <a:lnTo>
+                    <a:pt x="3008146" y="1968450"/>
+                  </a:lnTo>
+                  <a:lnTo>
+                    <a:pt x="3079768" y="1950856"/>
+                  </a:lnTo>
+                  <a:lnTo>
+                    <a:pt x="3151391" y="1932875"/>
+                  </a:lnTo>
+                  <a:lnTo>
+                    <a:pt x="3223013" y="1914497"/>
+                  </a:lnTo>
+                  <a:lnTo>
+                    <a:pt x="3294636" y="1895714"/>
+                  </a:lnTo>
+                  <a:lnTo>
+                    <a:pt x="3366258" y="1876516"/>
+                  </a:lnTo>
+                  <a:lnTo>
+                    <a:pt x="3437881" y="1856895"/>
+                  </a:lnTo>
+                  <a:lnTo>
+                    <a:pt x="3509503" y="1836841"/>
+                  </a:lnTo>
+                  <a:lnTo>
+                    <a:pt x="3581126" y="1816345"/>
+                  </a:lnTo>
+                  <a:lnTo>
+                    <a:pt x="3652748" y="1795397"/>
+                  </a:lnTo>
+                  <a:lnTo>
+                    <a:pt x="3724371" y="1773987"/>
+                  </a:lnTo>
+                  <a:lnTo>
+                    <a:pt x="3795993" y="1752105"/>
+                  </a:lnTo>
+                  <a:lnTo>
+                    <a:pt x="3867616" y="1729740"/>
+                  </a:lnTo>
+                  <a:lnTo>
+                    <a:pt x="3939238" y="1706882"/>
+                  </a:lnTo>
+                  <a:lnTo>
+                    <a:pt x="4010861" y="1683520"/>
+                  </a:lnTo>
+                  <a:lnTo>
+                    <a:pt x="4082483" y="1659642"/>
+                  </a:lnTo>
+                  <a:lnTo>
+                    <a:pt x="4154106" y="1635238"/>
+                  </a:lnTo>
+                  <a:lnTo>
+                    <a:pt x="4225729" y="1610296"/>
+                  </a:lnTo>
+                  <a:lnTo>
+                    <a:pt x="4297351" y="1584803"/>
+                  </a:lnTo>
+                  <a:lnTo>
+                    <a:pt x="4368974" y="1558748"/>
+                  </a:lnTo>
+                  <a:lnTo>
+                    <a:pt x="4440596" y="1532119"/>
+                  </a:lnTo>
+                  <a:lnTo>
+                    <a:pt x="4512219" y="1504902"/>
+                  </a:lnTo>
+                  <a:lnTo>
+                    <a:pt x="4583841" y="1477085"/>
+                  </a:lnTo>
+                  <a:lnTo>
+                    <a:pt x="4655464" y="1448655"/>
+                  </a:lnTo>
+                  <a:lnTo>
+                    <a:pt x="4727086" y="1419597"/>
+                  </a:lnTo>
+                  <a:lnTo>
+                    <a:pt x="4798709" y="1389899"/>
+                  </a:lnTo>
+                  <a:lnTo>
+                    <a:pt x="4870331" y="1359546"/>
+                  </a:lnTo>
+                  <a:lnTo>
+                    <a:pt x="4941954" y="1328523"/>
+                  </a:lnTo>
+                  <a:lnTo>
+                    <a:pt x="5013576" y="1296816"/>
+                  </a:lnTo>
+                  <a:lnTo>
+                    <a:pt x="5085199" y="1264409"/>
+                  </a:lnTo>
+                  <a:lnTo>
+                    <a:pt x="5156821" y="1231288"/>
+                  </a:lnTo>
+                  <a:lnTo>
+                    <a:pt x="5228444" y="1197437"/>
+                  </a:lnTo>
+                  <a:lnTo>
+                    <a:pt x="5300066" y="1162839"/>
+                  </a:lnTo>
+                  <a:lnTo>
+                    <a:pt x="5371689" y="1127477"/>
+                  </a:lnTo>
+                  <a:lnTo>
+                    <a:pt x="5443311" y="1091336"/>
+                  </a:lnTo>
+                  <a:lnTo>
+                    <a:pt x="5514934" y="1054398"/>
+                  </a:lnTo>
+                  <a:lnTo>
+                    <a:pt x="5586557" y="1016645"/>
+                  </a:lnTo>
+                  <a:lnTo>
+                    <a:pt x="5658179" y="978060"/>
+                  </a:lnTo>
+                  <a:lnTo>
+                    <a:pt x="5729802" y="938623"/>
+                  </a:lnTo>
+                  <a:lnTo>
+                    <a:pt x="5801424" y="898317"/>
+                  </a:lnTo>
+                  <a:lnTo>
+                    <a:pt x="5873047" y="857122"/>
+                  </a:lnTo>
+                  <a:lnTo>
+                    <a:pt x="5944669" y="815018"/>
+                  </a:lnTo>
+                  <a:lnTo>
+                    <a:pt x="6016292" y="771985"/>
+                  </a:lnTo>
+                  <a:lnTo>
+                    <a:pt x="6087914" y="728004"/>
+                  </a:lnTo>
+                  <a:lnTo>
+                    <a:pt x="6159537" y="683052"/>
+                  </a:lnTo>
+                  <a:lnTo>
+                    <a:pt x="6231159" y="637109"/>
+                  </a:lnTo>
+                  <a:lnTo>
+                    <a:pt x="6302782" y="590153"/>
+                  </a:lnTo>
+                  <a:lnTo>
+                    <a:pt x="6374404" y="542161"/>
+                  </a:lnTo>
+                  <a:lnTo>
+                    <a:pt x="6446027" y="493111"/>
+                  </a:lnTo>
+                  <a:lnTo>
+                    <a:pt x="6517649" y="442979"/>
+                  </a:lnTo>
+                  <a:lnTo>
+                    <a:pt x="6589272" y="391741"/>
+                  </a:lnTo>
+                  <a:lnTo>
+                    <a:pt x="6660894" y="339373"/>
+                  </a:lnTo>
+                  <a:lnTo>
+                    <a:pt x="6732517" y="285850"/>
+                  </a:lnTo>
+                  <a:lnTo>
+                    <a:pt x="6804139" y="231147"/>
+                  </a:lnTo>
+                  <a:lnTo>
+                    <a:pt x="6875762" y="175237"/>
+                  </a:lnTo>
+                  <a:lnTo>
+                    <a:pt x="6947385" y="118094"/>
+                  </a:lnTo>
+                  <a:lnTo>
+                    <a:pt x="7019007" y="59691"/>
                   </a:lnTo>
                   <a:lnTo>
                     <a:pt x="7090630" y="0"/>
@@ -4470,7 +4464,7 @@
           </p:nvSpPr>
           <p:spPr>
             <a:xfrm>
-              <a:off x="4472293" y="1896563"/>
+              <a:off x="4463824" y="1896563"/>
               <a:ext cx="0" cy="3826579"/>
             </a:xfrm>
             <a:custGeom>
@@ -4743,7 +4737,7 @@
           </p:nvSpPr>
           <p:spPr>
             <a:xfrm>
-              <a:off x="2004858" y="5785772"/>
+              <a:off x="2005445" y="5785772"/>
               <a:ext cx="223753" cy="80101"/>
             </a:xfrm>
             <a:prstGeom prst="rect">
@@ -4789,7 +4783,7 @@
           </p:nvSpPr>
           <p:spPr>
             <a:xfrm>
-              <a:off x="4499764" y="5785772"/>
+              <a:off x="4497209" y="5785772"/>
               <a:ext cx="62179" cy="80101"/>
             </a:xfrm>
             <a:prstGeom prst="rect">
@@ -4835,7 +4829,7 @@
           </p:nvSpPr>
           <p:spPr>
             <a:xfrm>
-              <a:off x="6851704" y="5785772"/>
+              <a:off x="6846007" y="5785772"/>
               <a:ext cx="186537" cy="80101"/>
             </a:xfrm>
             <a:prstGeom prst="rect">
